--- a/Curso Gas B/14 - UNE 60670 - Instalacion y conexion de aparatos/14 - UNE 60670 - Instalacion y conexion de aparatos - Vídeo 1.pptx
+++ b/Curso Gas B/14 - UNE 60670 - Instalacion y conexion de aparatos/14 - UNE 60670 - Instalacion y conexion de aparatos - Vídeo 1.pptx
@@ -19,6 +19,7 @@
     <p:sldId id="267" r:id="rId19"/>
     <p:sldId id="268" r:id="rId20"/>
     <p:sldId id="269" r:id="rId21"/>
+    <p:sldId id="270" r:id="rId22"/>
   </p:sldIdLst>
   <p:sldSz cx="12191695" cy="6858000" type="screen4x3"/>
   <p:notesSz cx="6858000" cy="9144000"/>
@@ -590,12 +591,12 @@
           <a:lstStyle/>
           <a:p>
             <a:r>
-              <a:t>N1: La tabla tiene un montón de casillas, ¿me las aprendo todas?</a:t>
-            </a:r>
-          </a:p>
-          <a:p>
-            <a:r>
-              <a:t>N2: Ni de broma, no memorices treinta casillas. Quédate con la lógica y colocas casi cualquier pregunta. Primera idea: la conexión rígida vale solo para aparatos fijos, dé igual que sea una casa o una industria; para algo móvil, rígida jamás. Segunda idea: los dos tubos que llevan enchufe de seguridad son solo de uso doméstico, de casa, pero sirven tanto para fijo como para móvil. Tercera idea: los tubos de elastómero, la goma, son el mundo de lo móvil y de las bombonas de GLP. Con esas tres frases resuelves la tabla uno sin empollarla.</a:t>
+              <a:t>N1: Vale, ¿y cómo elijo el tubo que une la llave con el aparato?</a:t>
+            </a:r>
+          </a:p>
+          <a:p>
+            <a:r>
+              <a:t>N2: Con dos tablas, y no hay más misterio. La conexión se hace siempre a partir de la llave de conexión de aparato, esa frontera de la que hablábamos. Para los aparatos normales, cocinas, calderas, calentadores, secadoras, usas la tabla uno. Para mecheros de laboratorio y sopletes, la tabla dos. Cada tabla te dice qué tipos de tubo valen. Y una regla de oro que está por encima de todo: cuando el aparato vibra al funcionar, una secadora, un equipo con motor, se recomienda tubo flexible. ¿Por qué? Porque un tubo rígido soldado a algo que tiembla acaba fatigándose y agrietándose, igual que un alambre que doblas muchas veces se acaba partiendo. El flexible absorbe ese temblor.</a:t>
             </a:r>
           </a:p>
         </p:txBody>
@@ -665,12 +666,12 @@
           <a:lstStyle/>
           <a:p>
             <a:r>
-              <a:t>N1: ¿Qué es exactamente ese enchufe de seguridad?</a:t>
-            </a:r>
-          </a:p>
-          <a:p>
-            <a:r>
-              <a:t>N2: Es una conexión rápida, tipo enganche, que tiene un truco: al desenchufar el aparato, corta el gas ella sola, automáticamente. No tienes que ir a cerrar ninguna llave; tiras del enganche y el paso se cierra. ¿Ves por qué la norma la reserva para uso doméstico? Está pensada para que en casa puedas separar la cocina o el aparato para limpiar detrás, o para cambiarlo, sin que se escape ni una burbuja de gas. En industria y comercio no se admiten esas conexiones con enchufe; allí se montan de otra forma. Enchufe de seguridad es igual a casa y a comodidad segura.</a:t>
+              <a:t>N1: La tabla tiene un montón de casillas, ¿me las aprendo todas?</a:t>
+            </a:r>
+          </a:p>
+          <a:p>
+            <a:r>
+              <a:t>N2: Ni de broma, no memorices treinta casillas. Quédate con la lógica y colocas casi cualquier pregunta. Primera idea: la conexión rígida vale solo para aparatos fijos, dé igual que sea una casa o una industria; para algo móvil, rígida jamás. Segunda idea: los dos tubos que llevan enchufe de seguridad son solo de uso doméstico, de casa, pero sirven tanto para fijo como para móvil. Tercera idea: los tubos de elastómero, la goma, son el mundo de lo móvil y de las bombonas de GLP. Con esas tres frases resuelves la tabla uno sin empollarla.</a:t>
             </a:r>
           </a:p>
         </p:txBody>
@@ -740,12 +741,12 @@
           <a:lstStyle/>
           <a:p>
             <a:r>
-              <a:t>N1: ¿Y la tabla dos en qué se diferencia?</a:t>
-            </a:r>
-          </a:p>
-          <a:p>
-            <a:r>
-              <a:t>N2: La tabla dos es solo para mecheros de laboratorio, los tipo Bunsen, y para sopletes. Y aquí hay una diferencia gorda: la conexión rígida es siempre que no. Piénsalo, tiene toda la lógica: un mechero o un soplete los mueves con la mano para trabajar, no vas a soldarlos con un tubo rígido a la pared. Por eso van con tubos flexibles: con enchufe de seguridad, de elastómero, o metálico corrugado. Un detalle fino que a veces cae: el tubo de elastómero con armadura para sopletes sigue la norma de las mangueras de soldadura, la de soldeo y corte, porque un soplete al fin y al cabo es una herramienta de soldar.</a:t>
+              <a:t>N1: ¿Qué es exactamente ese enchufe de seguridad?</a:t>
+            </a:r>
+          </a:p>
+          <a:p>
+            <a:r>
+              <a:t>N2: Es una conexión rápida, tipo enganche, que tiene un truco: al desenchufar el aparato, corta el gas ella sola, automáticamente. No tienes que ir a cerrar ninguna llave; tiras del enganche y el paso se cierra. ¿Ves por qué la norma la reserva para uso doméstico? Está pensada para que en casa puedas separar la cocina o el aparato para limpiar detrás, o para cambiarlo, sin que se escape ni una burbuja de gas. En industria y comercio no se admiten esas conexiones con enchufe; allí se montan de otra forma. Enchufe de seguridad es igual a casa y a comodidad segura.</a:t>
             </a:r>
           </a:p>
         </p:txBody>
@@ -815,12 +816,12 @@
           <a:lstStyle/>
           <a:p>
             <a:r>
-              <a:t>N1: Todo esto, ¿queda en algún papel?</a:t>
-            </a:r>
-          </a:p>
-          <a:p>
-            <a:r>
-              <a:t>N2: Sí, y conviene que lo tengas claro. Dónde va el aparato y qué tipo de conexión le has puesto forma parte de lo que la empresa instaladora refleja y firma en el certificado de instalación, lo que en la calle llamamos el boletín, con su tabla de aparatos del modelo IRG tres, y también en el certificado de puesta en marcha del aparato. Ese papel se le entrega al usuario y queda a disposición de la empresa distribuidora y de la comunidad autónoma. Aquí está la parte seria: si conectas un aparato con un tubo que la tabla no permite para ese uso, estás firmando algo que no cumple la norma. Tu firma dice que está bien hecho.</a:t>
+              <a:t>N1: ¿Y la tabla dos en qué se diferencia?</a:t>
+            </a:r>
+          </a:p>
+          <a:p>
+            <a:r>
+              <a:t>N2: La tabla dos es solo para mecheros de laboratorio, los tipo Bunsen, y para sopletes. Y aquí hay una diferencia gorda: la conexión rígida es siempre que no. Piénsalo, tiene toda la lógica: un mechero o un soplete los mueves con la mano para trabajar, no vas a soldarlos con un tubo rígido a la pared. Por eso van con tubos flexibles: con enchufe de seguridad, de elastómero, o metálico corrugado. Un detalle fino que a veces cae: el tubo de elastómero con armadura para sopletes sigue la norma de las mangueras de soldadura, la de soldeo y corte, porque un soplete al fin y al cabo es una herramienta de soldar.</a:t>
             </a:r>
           </a:p>
         </p:txBody>
@@ -890,6 +891,81 @@
           <a:lstStyle/>
           <a:p>
             <a:r>
+              <a:t>N1: Todo esto, ¿queda en algún papel?</a:t>
+            </a:r>
+          </a:p>
+          <a:p>
+            <a:r>
+              <a:t>N2: Sí, y conviene que lo tengas claro. Dónde va el aparato y qué tipo de conexión le has puesto forma parte de lo que la empresa instaladora refleja y firma en el certificado de instalación, lo que en la calle llamamos el boletín, con su tabla de aparatos del modelo IRG tres, y también en el certificado de puesta en marcha del aparato. Ese papel se le entrega al usuario y queda a disposición de la empresa distribuidora y de la comunidad autónoma. Aquí está la parte seria: si conectas un aparato con un tubo que la tabla no permite para ese uso, estás firmando algo que no cumple la norma. Tu firma dice que está bien hecho.</a:t>
+            </a:r>
+          </a:p>
+        </p:txBody>
+      </p:sp>
+      <p:sp>
+        <p:nvSpPr>
+          <p:cNvPr id="4" name="Slide Number Placeholder 3"/>
+          <p:cNvSpPr>
+            <a:spLocks noGrp="1"/>
+          </p:cNvSpPr>
+          <p:nvPr>
+            <p:ph type="sldNum" idx="5" sz="quarter"/>
+          </p:nvPr>
+        </p:nvSpPr>
+        <p:spPr/>
+      </p:sp>
+    </p:spTree>
+  </p:cSld>
+  <p:clrMapOvr>
+    <a:masterClrMapping/>
+  </p:clrMapOvr>
+</p:notes>
+</file>
+
+<file path=ppt/notesSlides/notesSlide15.xml><?xml version="1.0" encoding="utf-8"?>
+<p:notes xmlns:a="http://schemas.openxmlformats.org/drawingml/2006/main" xmlns:p="http://schemas.openxmlformats.org/presentationml/2006/main" xmlns:r="http://schemas.openxmlformats.org/officeDocument/2006/relationships">
+  <p:cSld>
+    <p:spTree>
+      <p:nvGrpSpPr>
+        <p:cNvPr id="1" name=""/>
+        <p:cNvGrpSpPr/>
+        <p:nvPr/>
+      </p:nvGrpSpPr>
+      <p:grpSpPr>
+        <a:xfrm>
+          <a:off x="0" y="0"/>
+          <a:ext cx="0" cy="0"/>
+          <a:chOff x="0" y="0"/>
+          <a:chExt cx="0" cy="0"/>
+        </a:xfrm>
+      </p:grpSpPr>
+      <p:sp>
+        <p:nvSpPr>
+          <p:cNvPr id="2" name="Slide Image Placeholder 1"/>
+          <p:cNvSpPr>
+            <a:spLocks noGrp="1"/>
+          </p:cNvSpPr>
+          <p:nvPr>
+            <p:ph type="sldImg" idx="2"/>
+          </p:nvPr>
+        </p:nvSpPr>
+        <p:spPr/>
+      </p:sp>
+      <p:sp>
+        <p:nvSpPr>
+          <p:cNvPr id="3" name="Notes Placeholder 2"/>
+          <p:cNvSpPr>
+            <a:spLocks noGrp="1"/>
+          </p:cNvSpPr>
+          <p:nvPr>
+            <p:ph type="body" idx="3" sz="quarter"/>
+          </p:nvPr>
+        </p:nvSpPr>
+        <p:spPr/>
+        <p:txBody>
+          <a:bodyPr/>
+          <a:lstStyle/>
+          <a:p>
+            <a:r>
               <a:t>N1: Profe, si tuviera que quedarme con lo esencial de hoy, ¿qué sería?</a:t>
             </a:r>
           </a:p>
@@ -1048,16 +1124,7 @@
         <p:txBody>
           <a:bodyPr/>
           <a:lstStyle/>
-          <a:p>
-            <a:r>
-              <a:t>N1: ¿Por qué trece partes? ¿No cabía en una?</a:t>
-            </a:r>
-          </a:p>
-          <a:p>
-            <a:r>
-              <a:t>N2: Es que la norma cubre toda la vida de una instalación receptora: diseñarla, construirla, ampliarla, probarla, ponerla en servicio y revisarla año tras año. Para no hacer un mamotreto único, lo reparten en trece cuadernos. Si la instalación fuera un edificio, hay un cuaderno para los tubos, otro para el diseño, otro para la prueba de estanquidad... y nosotros estudiamos el cuaderno siete, el de instalar y conectar los aparatos. Un dato que sí conviene retener: todo esto vale para instalaciones cuya presión máxima de operación, que es la presión más alta que puede llevar en funcionamiento, sea igual o menor a cinco bar. Por encima de cinco bar ya no manda esta norma.</a:t>
-            </a:r>
-          </a:p>
+          <a:p/>
         </p:txBody>
       </p:sp>
       <p:sp>
@@ -1125,12 +1192,12 @@
           <a:lstStyle/>
           <a:p>
             <a:r>
-              <a:t>N1: ¿Y qué tiene de especial la parte siete?</a:t>
-            </a:r>
-          </a:p>
-          <a:p>
-            <a:r>
-              <a:t>N2: Que es el tramo final, el que une tu instalación con el aparato de verdad. Acuérdate del tema del reglamento: la instalación receptora termina en la llave de conexión de aparato, esa llavecita que cierra el paso justo antes de la caldera o la cocina. Pues bien, todo lo que viene después de esa llave, el tubo que va hasta el aparato, es lo que gobierna la parte siete. Por eso digo que es el último metro: el punto exacto donde el gas se enchufa al aparato. Y fíjate en la ventaja práctica: si cierras esa llave, el aparato queda aislado y puedes desmontarlo o cambiar el tubo sin ningún peligro.</a:t>
+              <a:t>N1: ¿Por qué trece partes? ¿No cabía en una?</a:t>
+            </a:r>
+          </a:p>
+          <a:p>
+            <a:r>
+              <a:t>N2: Es que la norma cubre toda la vida de una instalación receptora: diseñarla, construirla, ampliarla, probarla, ponerla en servicio y revisarla año tras año. Para no hacer un mamotreto único, lo reparten en trece cuadernos. Si la instalación fuera un edificio, hay un cuaderno para los tubos, otro para el diseño, otro para la prueba de estanquidad... y nosotros estudiamos el cuaderno siete, el de instalar y conectar los aparatos. Un dato que sí conviene retener: todo esto vale para instalaciones cuya presión máxima de operación, que es la presión más alta que puede llevar en funcionamiento, sea igual o menor a cinco bar. Por encima de cinco bar ya no manda esta norma.</a:t>
             </a:r>
           </a:p>
         </p:txBody>
@@ -1200,12 +1267,12 @@
           <a:lstStyle/>
           <a:p>
             <a:r>
-              <a:t>N1: Entonces, ¿esto solo vale para el gas natural de la calle?</a:t>
-            </a:r>
-          </a:p>
-          <a:p>
-            <a:r>
-              <a:t>N2: No, y este detalle cae mucho. La parte siete manda en dos situaciones. Una, cuando el aparato cuelga de la instalación receptora, el gas de ciudad que llega por la tubería. Y dos, cuando cuelga de una bombona, un envase de gas licuado del petróleo, butano o propano, de contenido igual o menor a quince kilos. Por eso a lo largo del tema oirás una y otra vez «instalación receptora o envase de GLP»: son los dos sitios de donde puede salir el gas, y para los dos valen las mismas reglas de conexión. La bombona de la caravana y la caldera del piso comparten normativa en este punto.</a:t>
+              <a:t>N1: ¿Y qué tiene de especial la parte siete?</a:t>
+            </a:r>
+          </a:p>
+          <a:p>
+            <a:r>
+              <a:t>N2: Que es el tramo final, el que une tu instalación con el aparato de verdad. Acuérdate del tema del reglamento: la instalación receptora termina en la llave de conexión de aparato, esa llavecita que cierra el paso justo antes de la caldera o la cocina. Pues bien, todo lo que viene después de esa llave, el tubo que va hasta el aparato, es lo que gobierna la parte siete. Por eso digo que es el último metro: el punto exacto donde el gas se enchufa al aparato. Y fíjate en la ventaja práctica: si cierras esa llave, el aparato queda aislado y puedes desmontarlo o cambiar el tubo sin ningún peligro.</a:t>
             </a:r>
           </a:p>
         </p:txBody>
@@ -1275,12 +1342,12 @@
           <a:lstStyle/>
           <a:p>
             <a:r>
-              <a:t>N1: ¿Por qué obligan a que estén fijos?</a:t>
-            </a:r>
-          </a:p>
-          <a:p>
-            <a:r>
-              <a:t>N2: Piensa en qué es cada tipo. Un aparato tipo B o tipo C es de los que tienen conducto para sacar los humos fuera, como una caldera o un calentador estanco. Un aparato así no puede andar suelto de un lado a otro: tiene que ir anclado, fijo, porque su conducto de evacuación va conectado a un sitio concreto. Lo que sí puede moverse es el tipo A, el que no tiene conducto de humos y respira del propio cuarto: un hornillo de camping, una estufa de butano. Y esto no es un capricho: enlaza directo con las tablas de conexión. Lo fijo admite tubo rígido; lo móvil, casi siempre, tubo flexible. Fíjate cómo una cosa lleva a la otra.</a:t>
+              <a:t>N1: Entonces, ¿esto solo vale para el gas natural de la calle?</a:t>
+            </a:r>
+          </a:p>
+          <a:p>
+            <a:r>
+              <a:t>N2: No, y este detalle cae mucho. La parte siete manda en dos situaciones. Una, cuando el aparato cuelga de la instalación receptora, el gas de ciudad que llega por la tubería. Y dos, cuando cuelga de una bombona, un envase de gas licuado del petróleo, butano o propano, de contenido igual o menor a quince kilos. Por eso a lo largo del tema oirás una y otra vez «instalación receptora o envase de GLP»: son los dos sitios de donde puede salir el gas, y para los dos valen las mismas reglas de conexión. La bombona de la caravana y la caldera del piso comparten normativa en este punto.</a:t>
             </a:r>
           </a:p>
         </p:txBody>
@@ -1350,12 +1417,12 @@
           <a:lstStyle/>
           <a:p>
             <a:r>
-              <a:t>N1: ¿De dónde sale eso de los cuarenta centímetros?</a:t>
-            </a:r>
-          </a:p>
-          <a:p>
-            <a:r>
-              <a:t>N2: Imagínate un calentador de los de circuito abierto, esos que cogen el aire del cuarto, colgado justo encima de la encimera. Cuando enciendes los fuegos de abajo para cocinar, sube una columna de calor que le da de lleno al calentador y lo puede achicharrar. Para evitarlo, la norma exige que el extremo más cercano del calentador guarde cuarenta centímetros en horizontal respecto al quemador más próximo de la cocina. ¿Y si no tengo tanto sitio? Entonces pones una pantalla, una protección que corte ese calor, y con eso puedes bajar hasta diez centímetros. La regla para el examen es facilísima: cuarenta sin protección, diez con protección.</a:t>
+              <a:t>N1: ¿Por qué obligan a que estén fijos?</a:t>
+            </a:r>
+          </a:p>
+          <a:p>
+            <a:r>
+              <a:t>N2: Piensa en qué es cada tipo. Un aparato tipo B o tipo C es de los que tienen conducto para sacar los humos fuera, como una caldera o un calentador estanco. Un aparato así no puede andar suelto de un lado a otro: tiene que ir anclado, fijo, porque su conducto de evacuación va conectado a un sitio concreto. Lo que sí puede moverse es el tipo A, el que no tiene conducto de humos y respira del propio cuarto: un hornillo de camping, una estufa de butano. Y esto no es un capricho: enlaza directo con las tablas de conexión. Lo fijo admite tubo rígido; lo móvil, casi siempre, tubo flexible. Fíjate cómo una cosa lleva a la otra.</a:t>
             </a:r>
           </a:p>
         </p:txBody>
@@ -1425,12 +1492,12 @@
           <a:lstStyle/>
           <a:p>
             <a:r>
-              <a:t>N1: ¿Y por qué el tipo C se libra con solo diez?</a:t>
-            </a:r>
-          </a:p>
-          <a:p>
-            <a:r>
-              <a:t>N2: Porque el tipo C es el listo de la clase: es un aparato estanco. Estanco quiere decir que está sellado respecto a la habitación; coge el aire de fuera y expulsa los humos por su propio conducto, sin respirar del cuarto donde está. Como no depende del aire de la habitación y está mucho más protegido de ese golpe de calor de los fuegos, la norma se conforma con diez centímetros siempre, tenga pantalla o no la tenga. Resumen para que no se te olvide: circuito abierto, cuarenta o diez según la pantalla; tipo C, diez fijos y a otra cosa.</a:t>
+              <a:t>N1: ¿De dónde sale eso de los cuarenta centímetros?</a:t>
+            </a:r>
+          </a:p>
+          <a:p>
+            <a:r>
+              <a:t>N2: Imagínate un calentador de los de circuito abierto, esos que cogen el aire del cuarto, colgado justo encima de la encimera. Cuando enciendes los fuegos de abajo para cocinar, sube una columna de calor que le da de lleno al calentador y lo puede achicharrar. Para evitarlo, la norma exige que el extremo más cercano del calentador guarde cuarenta centímetros en horizontal respecto al quemador más próximo de la cocina. ¿Y si no tengo tanto sitio? Entonces pones una pantalla, una protección que corte ese calor, y con eso puedes bajar hasta diez centímetros. La regla para el examen es facilísima: cuarenta sin protección, diez con protección.</a:t>
             </a:r>
           </a:p>
         </p:txBody>
@@ -1500,12 +1567,12 @@
           <a:lstStyle/>
           <a:p>
             <a:r>
-              <a:t>N1: Vale, ¿y cómo elijo el tubo que une la llave con el aparato?</a:t>
-            </a:r>
-          </a:p>
-          <a:p>
-            <a:r>
-              <a:t>N2: Con dos tablas, y no hay más misterio. La conexión se hace siempre a partir de la llave de conexión de aparato, esa frontera de la que hablábamos. Para los aparatos normales, cocinas, calderas, calentadores, secadoras, usas la tabla uno. Para mecheros de laboratorio y sopletes, la tabla dos. Cada tabla te dice qué tipos de tubo valen. Y una regla de oro que está por encima de todo: cuando el aparato vibra al funcionar, una secadora, un equipo con motor, se recomienda tubo flexible. ¿Por qué? Porque un tubo rígido soldado a algo que tiembla acaba fatigándose y agrietándose, igual que un alambre que doblas muchas veces se acaba partiendo. El flexible absorbe ese temblor.</a:t>
+              <a:t>N1: ¿Y por qué el tipo C se libra con solo diez?</a:t>
+            </a:r>
+          </a:p>
+          <a:p>
+            <a:r>
+              <a:t>N2: Porque el tipo C es el listo de la clase: es un aparato estanco. Estanco quiere decir que está sellado respecto a la habitación; coge el aire de fuera y expulsa los humos por su propio conducto, sin respirar del cuarto donde está. Como no depende del aire de la habitación y está mucho más protegido de ese golpe de calor de los fuegos, la norma se conforma con diez centímetros siempre, tenga pantalla o no la tenga. Resumen para que no se te olvide: circuito abierto, cuarenta o diez según la pantalla; tipo C, diez fijos y a otra cosa.</a:t>
             </a:r>
           </a:p>
         </p:txBody>
@@ -4580,7 +4647,7 @@
             <a:r>
               <a:rPr sz="1400" b="1" i="0">
                 <a:solidFill>
-                  <a:srgbClr val="CADCFC"/>
+                  <a:srgbClr val="F4A24C"/>
                 </a:solidFill>
                 <a:latin typeface="Montserrat"/>
               </a:rPr>
@@ -4591,13 +4658,57 @@
       </p:sp>
       <p:sp>
         <p:nvSpPr>
-          <p:cNvPr id="4" name="TextBox 3"/>
+          <p:cNvPr id="4" name="Rounded Rectangle 3"/>
+          <p:cNvSpPr/>
+          <p:nvPr/>
+        </p:nvSpPr>
+        <p:spPr>
+          <a:xfrm>
+            <a:off x="868680" y="2057400"/>
+            <a:ext cx="1463040" cy="82296"/>
+          </a:xfrm>
+          <a:prstGeom prst="roundRect">
+            <a:avLst/>
+          </a:prstGeom>
+          <a:solidFill>
+            <a:srgbClr val="E8801A"/>
+          </a:solidFill>
+          <a:ln>
+            <a:noFill/>
+          </a:ln>
+          <a:effectLst/>
+        </p:spPr>
+        <p:style>
+          <a:lnRef idx="1">
+            <a:schemeClr val="accent1"/>
+          </a:lnRef>
+          <a:fillRef idx="3">
+            <a:schemeClr val="accent1"/>
+          </a:fillRef>
+          <a:effectRef idx="2">
+            <a:schemeClr val="accent1"/>
+          </a:effectRef>
+          <a:fontRef idx="minor">
+            <a:schemeClr val="lt1"/>
+          </a:fontRef>
+        </p:style>
+        <p:txBody>
+          <a:bodyPr rtlCol="0" anchor="ctr"/>
+          <a:lstStyle/>
+          <a:p>
+            <a:pPr algn="ctr"/>
+          </a:p>
+        </p:txBody>
+      </p:sp>
+      <p:sp>
+        <p:nvSpPr>
+          <p:cNvPr id="5" name="TextBox 4"/>
           <p:cNvSpPr txBox="1"/>
           <p:nvPr/>
         </p:nvSpPr>
         <p:spPr>
           <a:xfrm>
-            <a:off x="822960" y="2194560"/>
+            <a:off x="822960" y="2286000"/>
             <a:ext cx="10515600" cy="2011680"/>
           </a:xfrm>
           <a:prstGeom prst="rect">
@@ -4636,7 +4747,7 @@
       </p:sp>
       <p:sp>
         <p:nvSpPr>
-          <p:cNvPr id="5" name="TextBox 4"/>
+          <p:cNvPr id="6" name="TextBox 5"/>
           <p:cNvSpPr txBox="1"/>
           <p:nvPr/>
         </p:nvSpPr>
@@ -4760,7 +4871,7 @@
                 </a:solidFill>
                 <a:latin typeface="Montserrat"/>
               </a:rPr>
-              <a:t>010 / 014</a:t>
+              <a:t>010 / 015</a:t>
             </a:r>
           </a:p>
         </p:txBody>
@@ -4808,7 +4919,7 @@
         <p:spPr>
           <a:xfrm>
             <a:off x="822960" y="457200"/>
-            <a:ext cx="8229600" cy="365760"/>
+            <a:ext cx="10058400" cy="365760"/>
           </a:xfrm>
           <a:prstGeom prst="rect">
             <a:avLst/>
@@ -4822,13 +4933,13 @@
           <a:lstStyle/>
           <a:p>
             <a:r>
-              <a:rPr sz="1200" b="1" i="0">
-                <a:solidFill>
-                  <a:srgbClr val="64748B"/>
-                </a:solidFill>
-                <a:latin typeface="Montserrat"/>
-              </a:rPr>
-              <a:t>TABLA 1 · APARATOS</a:t>
+              <a:rPr sz="1300" b="1" i="0">
+                <a:solidFill>
+                  <a:srgbClr val="E8801A"/>
+                </a:solidFill>
+                <a:latin typeface="Montserrat"/>
+              </a:rPr>
+              <a:t>TIPOS DE CONEXIÓN</a:t>
             </a:r>
           </a:p>
         </p:txBody>
@@ -4856,26 +4967,70 @@
           <a:lstStyle/>
           <a:p>
             <a:r>
-              <a:rPr sz="2700" b="1" i="0">
+              <a:rPr sz="2800" b="1" i="0">
                 <a:solidFill>
                   <a:srgbClr val="1E2761"/>
                 </a:solidFill>
                 <a:latin typeface="Montserrat"/>
               </a:rPr>
-              <a:t>Cómo leerla sin marearte</a:t>
-            </a:r>
-          </a:p>
-        </p:txBody>
-      </p:sp>
-      <p:sp>
-        <p:nvSpPr>
-          <p:cNvPr id="7" name="TextBox 6"/>
+              <a:t>Todo pasa por la llave</a:t>
+            </a:r>
+          </a:p>
+        </p:txBody>
+      </p:sp>
+      <p:sp>
+        <p:nvSpPr>
+          <p:cNvPr id="7" name="Rounded Rectangle 6"/>
+          <p:cNvSpPr/>
+          <p:nvPr/>
+        </p:nvSpPr>
+        <p:spPr>
+          <a:xfrm>
+            <a:off x="868680" y="1627632"/>
+            <a:ext cx="2011680" cy="73152"/>
+          </a:xfrm>
+          <a:prstGeom prst="roundRect">
+            <a:avLst/>
+          </a:prstGeom>
+          <a:solidFill>
+            <a:srgbClr val="E8801A"/>
+          </a:solidFill>
+          <a:ln>
+            <a:noFill/>
+          </a:ln>
+          <a:effectLst/>
+        </p:spPr>
+        <p:style>
+          <a:lnRef idx="1">
+            <a:schemeClr val="accent1"/>
+          </a:lnRef>
+          <a:fillRef idx="3">
+            <a:schemeClr val="accent1"/>
+          </a:fillRef>
+          <a:effectRef idx="2">
+            <a:schemeClr val="accent1"/>
+          </a:effectRef>
+          <a:fontRef idx="minor">
+            <a:schemeClr val="lt1"/>
+          </a:fontRef>
+        </p:style>
+        <p:txBody>
+          <a:bodyPr rtlCol="0" anchor="ctr"/>
+          <a:lstStyle/>
+          <a:p>
+            <a:pPr algn="ctr"/>
+          </a:p>
+        </p:txBody>
+      </p:sp>
+      <p:sp>
+        <p:nvSpPr>
+          <p:cNvPr id="8" name="TextBox 7"/>
           <p:cNvSpPr txBox="1"/>
           <p:nvPr/>
         </p:nvSpPr>
         <p:spPr>
           <a:xfrm>
-            <a:off x="822960" y="1920240"/>
+            <a:off x="822960" y="1965960"/>
             <a:ext cx="4983480" cy="4206240"/>
           </a:xfrm>
           <a:prstGeom prst="rect">
@@ -4891,17 +5046,17 @@
           <a:p>
             <a:pPr>
               <a:spcAft>
-                <a:spcPts val="1000"/>
+                <a:spcPts val="1100"/>
               </a:spcAft>
             </a:pPr>
             <a:r>
               <a:rPr sz="1600" b="1" i="0">
                 <a:solidFill>
-                  <a:srgbClr val="2E3A80"/>
-                </a:solidFill>
-                <a:latin typeface="Montserrat"/>
-              </a:rPr>
-              <a:t>•  </a:t>
+                  <a:srgbClr val="E8801A"/>
+                </a:solidFill>
+                <a:latin typeface="Montserrat"/>
+              </a:rPr>
+              <a:t>▸  </a:t>
             </a:r>
             <a:r>
               <a:rPr sz="1600" b="0" i="0">
@@ -4910,23 +5065,23 @@
                 </a:solidFill>
                 <a:latin typeface="Montserrat"/>
               </a:rPr>
-              <a:t>Rígida → solo aparatos fijos</a:t>
+              <a:t>Conexión tras la llave de aparato</a:t>
             </a:r>
           </a:p>
           <a:p>
             <a:pPr>
               <a:spcAft>
-                <a:spcPts val="1000"/>
+                <a:spcPts val="1100"/>
               </a:spcAft>
             </a:pPr>
             <a:r>
               <a:rPr sz="1600" b="1" i="0">
                 <a:solidFill>
-                  <a:srgbClr val="2E3A80"/>
-                </a:solidFill>
-                <a:latin typeface="Montserrat"/>
-              </a:rPr>
-              <a:t>•  </a:t>
+                  <a:srgbClr val="E8801A"/>
+                </a:solidFill>
+                <a:latin typeface="Montserrat"/>
+              </a:rPr>
+              <a:t>▸  </a:t>
             </a:r>
             <a:r>
               <a:rPr sz="1600" b="0" i="0">
@@ -4935,23 +5090,23 @@
                 </a:solidFill>
                 <a:latin typeface="Montserrat"/>
               </a:rPr>
-              <a:t>Con enchufe de seguridad → solo doméstico</a:t>
+              <a:t>Tabla 1: aparatos de gas</a:t>
             </a:r>
           </a:p>
           <a:p>
             <a:pPr>
               <a:spcAft>
-                <a:spcPts val="1000"/>
+                <a:spcPts val="1100"/>
               </a:spcAft>
             </a:pPr>
             <a:r>
               <a:rPr sz="1600" b="1" i="0">
                 <a:solidFill>
-                  <a:srgbClr val="2E3A80"/>
-                </a:solidFill>
-                <a:latin typeface="Montserrat"/>
-              </a:rPr>
-              <a:t>•  </a:t>
+                  <a:srgbClr val="E8801A"/>
+                </a:solidFill>
+                <a:latin typeface="Montserrat"/>
+              </a:rPr>
+              <a:t>▸  </a:t>
             </a:r>
             <a:r>
               <a:rPr sz="1600" b="0" i="0">
@@ -4960,14 +5115,39 @@
                 </a:solidFill>
                 <a:latin typeface="Montserrat"/>
               </a:rPr>
-              <a:t>Elastómeros → lo móvil y el GLP</a:t>
-            </a:r>
-          </a:p>
-        </p:txBody>
-      </p:sp>
-      <p:sp>
-        <p:nvSpPr>
-          <p:cNvPr id="8" name="imgph" descr="IMGQ:gas installation copper pipe wall"/>
+              <a:t>Tabla 2: mecheros y sopletes</a:t>
+            </a:r>
+          </a:p>
+          <a:p>
+            <a:pPr>
+              <a:spcAft>
+                <a:spcPts val="1100"/>
+              </a:spcAft>
+            </a:pPr>
+            <a:r>
+              <a:rPr sz="1600" b="1" i="0">
+                <a:solidFill>
+                  <a:srgbClr val="E8801A"/>
+                </a:solidFill>
+                <a:latin typeface="Montserrat"/>
+              </a:rPr>
+              <a:t>▸  </a:t>
+            </a:r>
+            <a:r>
+              <a:rPr sz="1600" b="0" i="0">
+                <a:solidFill>
+                  <a:srgbClr val="1B2330"/>
+                </a:solidFill>
+                <a:latin typeface="Montserrat"/>
+              </a:rPr>
+              <a:t>Si el aparato vibra, flexible</a:t>
+            </a:r>
+          </a:p>
+        </p:txBody>
+      </p:sp>
+      <p:sp>
+        <p:nvSpPr>
+          <p:cNvPr id="9" name="imgph" descr="IMGQ:flexible gas hose connection appliance"/>
           <p:cNvSpPr/>
           <p:nvPr/>
         </p:nvSpPr>
@@ -5013,7 +5193,7 @@
       </p:sp>
       <p:sp>
         <p:nvSpPr>
-          <p:cNvPr id="9" name="TextBox 8"/>
+          <p:cNvPr id="10" name="TextBox 9"/>
           <p:cNvSpPr txBox="1"/>
           <p:nvPr/>
         </p:nvSpPr>
@@ -5053,7 +5233,7 @@
                 </a:solidFill>
                 <a:latin typeface="Montserrat"/>
               </a:rPr>
-              <a:t>gas installation copper pipe wall</a:t>
+              <a:t>flexible gas hose connection appliance</a:t>
             </a:r>
           </a:p>
         </p:txBody>
@@ -5150,7 +5330,7 @@
                 </a:solidFill>
                 <a:latin typeface="Montserrat"/>
               </a:rPr>
-              <a:t>011 / 014</a:t>
+              <a:t>011 / 015</a:t>
             </a:r>
           </a:p>
         </p:txBody>
@@ -5198,7 +5378,7 @@
         <p:spPr>
           <a:xfrm>
             <a:off x="822960" y="457200"/>
-            <a:ext cx="8229600" cy="365760"/>
+            <a:ext cx="10058400" cy="365760"/>
           </a:xfrm>
           <a:prstGeom prst="rect">
             <a:avLst/>
@@ -5212,13 +5392,13 @@
           <a:lstStyle/>
           <a:p>
             <a:r>
-              <a:rPr sz="1200" b="1" i="0">
-                <a:solidFill>
-                  <a:srgbClr val="64748B"/>
-                </a:solidFill>
-                <a:latin typeface="Montserrat"/>
-              </a:rPr>
-              <a:t>CONCEPTO CLAVE</a:t>
+              <a:rPr sz="1300" b="1" i="0">
+                <a:solidFill>
+                  <a:srgbClr val="E8801A"/>
+                </a:solidFill>
+                <a:latin typeface="Montserrat"/>
+              </a:rPr>
+              <a:t>TABLA 1 · APARATOS</a:t>
             </a:r>
           </a:p>
         </p:txBody>
@@ -5246,26 +5426,70 @@
           <a:lstStyle/>
           <a:p>
             <a:r>
-              <a:rPr sz="2700" b="1" i="0">
+              <a:rPr sz="2800" b="1" i="0">
                 <a:solidFill>
                   <a:srgbClr val="1E2761"/>
                 </a:solidFill>
                 <a:latin typeface="Montserrat"/>
               </a:rPr>
-              <a:t>El enchufe de seguridad</a:t>
-            </a:r>
-          </a:p>
-        </p:txBody>
-      </p:sp>
-      <p:sp>
-        <p:nvSpPr>
-          <p:cNvPr id="7" name="TextBox 6"/>
+              <a:t>Cómo leerla sin marearte</a:t>
+            </a:r>
+          </a:p>
+        </p:txBody>
+      </p:sp>
+      <p:sp>
+        <p:nvSpPr>
+          <p:cNvPr id="7" name="Rounded Rectangle 6"/>
+          <p:cNvSpPr/>
+          <p:nvPr/>
+        </p:nvSpPr>
+        <p:spPr>
+          <a:xfrm>
+            <a:off x="868680" y="1627632"/>
+            <a:ext cx="2011680" cy="73152"/>
+          </a:xfrm>
+          <a:prstGeom prst="roundRect">
+            <a:avLst/>
+          </a:prstGeom>
+          <a:solidFill>
+            <a:srgbClr val="E8801A"/>
+          </a:solidFill>
+          <a:ln>
+            <a:noFill/>
+          </a:ln>
+          <a:effectLst/>
+        </p:spPr>
+        <p:style>
+          <a:lnRef idx="1">
+            <a:schemeClr val="accent1"/>
+          </a:lnRef>
+          <a:fillRef idx="3">
+            <a:schemeClr val="accent1"/>
+          </a:fillRef>
+          <a:effectRef idx="2">
+            <a:schemeClr val="accent1"/>
+          </a:effectRef>
+          <a:fontRef idx="minor">
+            <a:schemeClr val="lt1"/>
+          </a:fontRef>
+        </p:style>
+        <p:txBody>
+          <a:bodyPr rtlCol="0" anchor="ctr"/>
+          <a:lstStyle/>
+          <a:p>
+            <a:pPr algn="ctr"/>
+          </a:p>
+        </p:txBody>
+      </p:sp>
+      <p:sp>
+        <p:nvSpPr>
+          <p:cNvPr id="8" name="TextBox 7"/>
           <p:cNvSpPr txBox="1"/>
           <p:nvPr/>
         </p:nvSpPr>
         <p:spPr>
           <a:xfrm>
-            <a:off x="822960" y="1920240"/>
+            <a:off x="822960" y="1965960"/>
             <a:ext cx="4983480" cy="4206240"/>
           </a:xfrm>
           <a:prstGeom prst="rect">
@@ -5281,17 +5505,17 @@
           <a:p>
             <a:pPr>
               <a:spcAft>
-                <a:spcPts val="1000"/>
+                <a:spcPts val="1100"/>
               </a:spcAft>
             </a:pPr>
             <a:r>
               <a:rPr sz="1600" b="1" i="0">
                 <a:solidFill>
-                  <a:srgbClr val="2E3A80"/>
-                </a:solidFill>
-                <a:latin typeface="Montserrat"/>
-              </a:rPr>
-              <a:t>•  </a:t>
+                  <a:srgbClr val="E8801A"/>
+                </a:solidFill>
+                <a:latin typeface="Montserrat"/>
+              </a:rPr>
+              <a:t>▸  </a:t>
             </a:r>
             <a:r>
               <a:rPr sz="1600" b="0" i="0">
@@ -5300,23 +5524,23 @@
                 </a:solidFill>
                 <a:latin typeface="Montserrat"/>
               </a:rPr>
-              <a:t>Conexión rápida que corta el gas sola</a:t>
+              <a:t>Rígida → solo aparatos fijos</a:t>
             </a:r>
           </a:p>
           <a:p>
             <a:pPr>
               <a:spcAft>
-                <a:spcPts val="1000"/>
+                <a:spcPts val="1100"/>
               </a:spcAft>
             </a:pPr>
             <a:r>
               <a:rPr sz="1600" b="1" i="0">
                 <a:solidFill>
-                  <a:srgbClr val="2E3A80"/>
-                </a:solidFill>
-                <a:latin typeface="Montserrat"/>
-              </a:rPr>
-              <a:t>•  </a:t>
+                  <a:srgbClr val="E8801A"/>
+                </a:solidFill>
+                <a:latin typeface="Montserrat"/>
+              </a:rPr>
+              <a:t>▸  </a:t>
             </a:r>
             <a:r>
               <a:rPr sz="1600" b="0" i="0">
@@ -5325,23 +5549,23 @@
                 </a:solidFill>
                 <a:latin typeface="Montserrat"/>
               </a:rPr>
-              <a:t>Al desenchufar, no hay fuga</a:t>
+              <a:t>Con enchufe de seguridad → solo doméstico</a:t>
             </a:r>
           </a:p>
           <a:p>
             <a:pPr>
               <a:spcAft>
-                <a:spcPts val="1000"/>
+                <a:spcPts val="1100"/>
               </a:spcAft>
             </a:pPr>
             <a:r>
               <a:rPr sz="1600" b="1" i="0">
                 <a:solidFill>
-                  <a:srgbClr val="2E3A80"/>
-                </a:solidFill>
-                <a:latin typeface="Montserrat"/>
-              </a:rPr>
-              <a:t>•  </a:t>
+                  <a:srgbClr val="E8801A"/>
+                </a:solidFill>
+                <a:latin typeface="Montserrat"/>
+              </a:rPr>
+              <a:t>▸  </a:t>
             </a:r>
             <a:r>
               <a:rPr sz="1600" b="0" i="0">
@@ -5350,14 +5574,14 @@
                 </a:solidFill>
                 <a:latin typeface="Montserrat"/>
               </a:rPr>
-              <a:t>Por eso: solo uso doméstico</a:t>
-            </a:r>
-          </a:p>
-        </p:txBody>
-      </p:sp>
-      <p:sp>
-        <p:nvSpPr>
-          <p:cNvPr id="8" name="imgph" descr="IMGQ:gas safety quick connector plug"/>
+              <a:t>Elastómeros → lo móvil y el GLP</a:t>
+            </a:r>
+          </a:p>
+        </p:txBody>
+      </p:sp>
+      <p:sp>
+        <p:nvSpPr>
+          <p:cNvPr id="9" name="imgph" descr="IMGQ:gas installation copper pipe wall"/>
           <p:cNvSpPr/>
           <p:nvPr/>
         </p:nvSpPr>
@@ -5403,7 +5627,7 @@
       </p:sp>
       <p:sp>
         <p:nvSpPr>
-          <p:cNvPr id="9" name="TextBox 8"/>
+          <p:cNvPr id="10" name="TextBox 9"/>
           <p:cNvSpPr txBox="1"/>
           <p:nvPr/>
         </p:nvSpPr>
@@ -5443,7 +5667,7 @@
                 </a:solidFill>
                 <a:latin typeface="Montserrat"/>
               </a:rPr>
-              <a:t>gas safety quick connector plug</a:t>
+              <a:t>gas installation copper pipe wall</a:t>
             </a:r>
           </a:p>
         </p:txBody>
@@ -5540,7 +5764,7 @@
                 </a:solidFill>
                 <a:latin typeface="Montserrat"/>
               </a:rPr>
-              <a:t>012 / 014</a:t>
+              <a:t>012 / 015</a:t>
             </a:r>
           </a:p>
         </p:txBody>
@@ -5588,7 +5812,7 @@
         <p:spPr>
           <a:xfrm>
             <a:off x="822960" y="457200"/>
-            <a:ext cx="8229600" cy="365760"/>
+            <a:ext cx="10058400" cy="365760"/>
           </a:xfrm>
           <a:prstGeom prst="rect">
             <a:avLst/>
@@ -5602,13 +5826,13 @@
           <a:lstStyle/>
           <a:p>
             <a:r>
-              <a:rPr sz="1200" b="1" i="0">
-                <a:solidFill>
-                  <a:srgbClr val="64748B"/>
-                </a:solidFill>
-                <a:latin typeface="Montserrat"/>
-              </a:rPr>
-              <a:t>TABLA 2 · MECHEROS Y SOPLETES</a:t>
+              <a:rPr sz="1300" b="1" i="0">
+                <a:solidFill>
+                  <a:srgbClr val="E8801A"/>
+                </a:solidFill>
+                <a:latin typeface="Montserrat"/>
+              </a:rPr>
+              <a:t>CONCEPTO CLAVE</a:t>
             </a:r>
           </a:p>
         </p:txBody>
@@ -5636,26 +5860,70 @@
           <a:lstStyle/>
           <a:p>
             <a:r>
-              <a:rPr sz="2700" b="1" i="0">
+              <a:rPr sz="2800" b="1" i="0">
                 <a:solidFill>
                   <a:srgbClr val="1E2761"/>
                 </a:solidFill>
                 <a:latin typeface="Montserrat"/>
               </a:rPr>
-              <a:t>Aquí, rígida nunca</a:t>
-            </a:r>
-          </a:p>
-        </p:txBody>
-      </p:sp>
-      <p:sp>
-        <p:nvSpPr>
-          <p:cNvPr id="7" name="TextBox 6"/>
+              <a:t>El enchufe de seguridad</a:t>
+            </a:r>
+          </a:p>
+        </p:txBody>
+      </p:sp>
+      <p:sp>
+        <p:nvSpPr>
+          <p:cNvPr id="7" name="Rounded Rectangle 6"/>
+          <p:cNvSpPr/>
+          <p:nvPr/>
+        </p:nvSpPr>
+        <p:spPr>
+          <a:xfrm>
+            <a:off x="868680" y="1627632"/>
+            <a:ext cx="2011680" cy="73152"/>
+          </a:xfrm>
+          <a:prstGeom prst="roundRect">
+            <a:avLst/>
+          </a:prstGeom>
+          <a:solidFill>
+            <a:srgbClr val="E8801A"/>
+          </a:solidFill>
+          <a:ln>
+            <a:noFill/>
+          </a:ln>
+          <a:effectLst/>
+        </p:spPr>
+        <p:style>
+          <a:lnRef idx="1">
+            <a:schemeClr val="accent1"/>
+          </a:lnRef>
+          <a:fillRef idx="3">
+            <a:schemeClr val="accent1"/>
+          </a:fillRef>
+          <a:effectRef idx="2">
+            <a:schemeClr val="accent1"/>
+          </a:effectRef>
+          <a:fontRef idx="minor">
+            <a:schemeClr val="lt1"/>
+          </a:fontRef>
+        </p:style>
+        <p:txBody>
+          <a:bodyPr rtlCol="0" anchor="ctr"/>
+          <a:lstStyle/>
+          <a:p>
+            <a:pPr algn="ctr"/>
+          </a:p>
+        </p:txBody>
+      </p:sp>
+      <p:sp>
+        <p:nvSpPr>
+          <p:cNvPr id="8" name="TextBox 7"/>
           <p:cNvSpPr txBox="1"/>
           <p:nvPr/>
         </p:nvSpPr>
         <p:spPr>
           <a:xfrm>
-            <a:off x="822960" y="1920240"/>
+            <a:off x="822960" y="1965960"/>
             <a:ext cx="4983480" cy="4206240"/>
           </a:xfrm>
           <a:prstGeom prst="rect">
@@ -5671,17 +5939,17 @@
           <a:p>
             <a:pPr>
               <a:spcAft>
-                <a:spcPts val="1000"/>
+                <a:spcPts val="1100"/>
               </a:spcAft>
             </a:pPr>
             <a:r>
               <a:rPr sz="1600" b="1" i="0">
                 <a:solidFill>
-                  <a:srgbClr val="2E3A80"/>
-                </a:solidFill>
-                <a:latin typeface="Montserrat"/>
-              </a:rPr>
-              <a:t>•  </a:t>
+                  <a:srgbClr val="E8801A"/>
+                </a:solidFill>
+                <a:latin typeface="Montserrat"/>
+              </a:rPr>
+              <a:t>▸  </a:t>
             </a:r>
             <a:r>
               <a:rPr sz="1600" b="0" i="0">
@@ -5690,23 +5958,23 @@
                 </a:solidFill>
                 <a:latin typeface="Montserrat"/>
               </a:rPr>
-              <a:t>Mecheros y sopletes se mueven</a:t>
+              <a:t>Conexión rápida que corta el gas sola</a:t>
             </a:r>
           </a:p>
           <a:p>
             <a:pPr>
               <a:spcAft>
-                <a:spcPts val="1000"/>
+                <a:spcPts val="1100"/>
               </a:spcAft>
             </a:pPr>
             <a:r>
               <a:rPr sz="1600" b="1" i="0">
                 <a:solidFill>
-                  <a:srgbClr val="2E3A80"/>
-                </a:solidFill>
-                <a:latin typeface="Montserrat"/>
-              </a:rPr>
-              <a:t>•  </a:t>
+                  <a:srgbClr val="E8801A"/>
+                </a:solidFill>
+                <a:latin typeface="Montserrat"/>
+              </a:rPr>
+              <a:t>▸  </a:t>
             </a:r>
             <a:r>
               <a:rPr sz="1600" b="0" i="0">
@@ -5715,23 +5983,23 @@
                 </a:solidFill>
                 <a:latin typeface="Montserrat"/>
               </a:rPr>
-              <a:t>Conexión rígida: siempre NO</a:t>
+              <a:t>Al desenchufar, no hay fuga</a:t>
             </a:r>
           </a:p>
           <a:p>
             <a:pPr>
               <a:spcAft>
-                <a:spcPts val="1000"/>
+                <a:spcPts val="1100"/>
               </a:spcAft>
             </a:pPr>
             <a:r>
               <a:rPr sz="1600" b="1" i="0">
                 <a:solidFill>
-                  <a:srgbClr val="2E3A80"/>
-                </a:solidFill>
-                <a:latin typeface="Montserrat"/>
-              </a:rPr>
-              <a:t>•  </a:t>
+                  <a:srgbClr val="E8801A"/>
+                </a:solidFill>
+                <a:latin typeface="Montserrat"/>
+              </a:rPr>
+              <a:t>▸  </a:t>
             </a:r>
             <a:r>
               <a:rPr sz="1600" b="0" i="0">
@@ -5740,14 +6008,14 @@
                 </a:solidFill>
                 <a:latin typeface="Montserrat"/>
               </a:rPr>
-              <a:t>Van con flexibles adecuados</a:t>
-            </a:r>
-          </a:p>
-        </p:txBody>
-      </p:sp>
-      <p:sp>
-        <p:nvSpPr>
-          <p:cNvPr id="8" name="imgph" descr="IMGQ:laboratory bunsen burner flame"/>
+              <a:t>Por eso: solo uso doméstico</a:t>
+            </a:r>
+          </a:p>
+        </p:txBody>
+      </p:sp>
+      <p:sp>
+        <p:nvSpPr>
+          <p:cNvPr id="9" name="imgph" descr="IMGQ:gas safety quick connector plug"/>
           <p:cNvSpPr/>
           <p:nvPr/>
         </p:nvSpPr>
@@ -5793,7 +6061,7 @@
       </p:sp>
       <p:sp>
         <p:nvSpPr>
-          <p:cNvPr id="9" name="TextBox 8"/>
+          <p:cNvPr id="10" name="TextBox 9"/>
           <p:cNvSpPr txBox="1"/>
           <p:nvPr/>
         </p:nvSpPr>
@@ -5833,7 +6101,7 @@
                 </a:solidFill>
                 <a:latin typeface="Montserrat"/>
               </a:rPr>
-              <a:t>laboratory bunsen burner flame</a:t>
+              <a:t>gas safety quick connector plug</a:t>
             </a:r>
           </a:p>
         </p:txBody>
@@ -5930,7 +6198,7 @@
                 </a:solidFill>
                 <a:latin typeface="Montserrat"/>
               </a:rPr>
-              <a:t>013 / 014</a:t>
+              <a:t>013 / 015</a:t>
             </a:r>
           </a:p>
         </p:txBody>
@@ -5978,7 +6246,7 @@
         <p:spPr>
           <a:xfrm>
             <a:off x="822960" y="457200"/>
-            <a:ext cx="8229600" cy="365760"/>
+            <a:ext cx="10058400" cy="365760"/>
           </a:xfrm>
           <a:prstGeom prst="rect">
             <a:avLst/>
@@ -5992,13 +6260,13 @@
           <a:lstStyle/>
           <a:p>
             <a:r>
-              <a:rPr sz="1200" b="1" i="0">
-                <a:solidFill>
-                  <a:srgbClr val="64748B"/>
-                </a:solidFill>
-                <a:latin typeface="Montserrat"/>
-              </a:rPr>
-              <a:t>EL PAPELEO</a:t>
+              <a:rPr sz="1300" b="1" i="0">
+                <a:solidFill>
+                  <a:srgbClr val="E8801A"/>
+                </a:solidFill>
+                <a:latin typeface="Montserrat"/>
+              </a:rPr>
+              <a:t>TABLA 2 · MECHEROS Y SOPLETES</a:t>
             </a:r>
           </a:p>
         </p:txBody>
@@ -6026,26 +6294,70 @@
           <a:lstStyle/>
           <a:p>
             <a:r>
-              <a:rPr sz="2700" b="1" i="0">
+              <a:rPr sz="2800" b="1" i="0">
                 <a:solidFill>
                   <a:srgbClr val="1E2761"/>
                 </a:solidFill>
                 <a:latin typeface="Montserrat"/>
               </a:rPr>
-              <a:t>Lo que firmas queda escrito</a:t>
-            </a:r>
-          </a:p>
-        </p:txBody>
-      </p:sp>
-      <p:sp>
-        <p:nvSpPr>
-          <p:cNvPr id="7" name="TextBox 6"/>
+              <a:t>Aquí, rígida nunca</a:t>
+            </a:r>
+          </a:p>
+        </p:txBody>
+      </p:sp>
+      <p:sp>
+        <p:nvSpPr>
+          <p:cNvPr id="7" name="Rounded Rectangle 6"/>
+          <p:cNvSpPr/>
+          <p:nvPr/>
+        </p:nvSpPr>
+        <p:spPr>
+          <a:xfrm>
+            <a:off x="868680" y="1627632"/>
+            <a:ext cx="2011680" cy="73152"/>
+          </a:xfrm>
+          <a:prstGeom prst="roundRect">
+            <a:avLst/>
+          </a:prstGeom>
+          <a:solidFill>
+            <a:srgbClr val="E8801A"/>
+          </a:solidFill>
+          <a:ln>
+            <a:noFill/>
+          </a:ln>
+          <a:effectLst/>
+        </p:spPr>
+        <p:style>
+          <a:lnRef idx="1">
+            <a:schemeClr val="accent1"/>
+          </a:lnRef>
+          <a:fillRef idx="3">
+            <a:schemeClr val="accent1"/>
+          </a:fillRef>
+          <a:effectRef idx="2">
+            <a:schemeClr val="accent1"/>
+          </a:effectRef>
+          <a:fontRef idx="minor">
+            <a:schemeClr val="lt1"/>
+          </a:fontRef>
+        </p:style>
+        <p:txBody>
+          <a:bodyPr rtlCol="0" anchor="ctr"/>
+          <a:lstStyle/>
+          <a:p>
+            <a:pPr algn="ctr"/>
+          </a:p>
+        </p:txBody>
+      </p:sp>
+      <p:sp>
+        <p:nvSpPr>
+          <p:cNvPr id="8" name="TextBox 7"/>
           <p:cNvSpPr txBox="1"/>
           <p:nvPr/>
         </p:nvSpPr>
         <p:spPr>
           <a:xfrm>
-            <a:off x="822960" y="1920240"/>
+            <a:off x="822960" y="1965960"/>
             <a:ext cx="4983480" cy="4206240"/>
           </a:xfrm>
           <a:prstGeom prst="rect">
@@ -6061,17 +6373,17 @@
           <a:p>
             <a:pPr>
               <a:spcAft>
-                <a:spcPts val="1000"/>
+                <a:spcPts val="1100"/>
               </a:spcAft>
             </a:pPr>
             <a:r>
               <a:rPr sz="1600" b="1" i="0">
                 <a:solidFill>
-                  <a:srgbClr val="2E3A80"/>
-                </a:solidFill>
-                <a:latin typeface="Montserrat"/>
-              </a:rPr>
-              <a:t>•  </a:t>
+                  <a:srgbClr val="E8801A"/>
+                </a:solidFill>
+                <a:latin typeface="Montserrat"/>
+              </a:rPr>
+              <a:t>▸  </a:t>
             </a:r>
             <a:r>
               <a:rPr sz="1600" b="0" i="0">
@@ -6080,23 +6392,23 @@
                 </a:solidFill>
                 <a:latin typeface="Montserrat"/>
               </a:rPr>
-              <a:t>Certificado de instalación (el boletín)</a:t>
+              <a:t>Mecheros y sopletes se mueven</a:t>
             </a:r>
           </a:p>
           <a:p>
             <a:pPr>
               <a:spcAft>
-                <a:spcPts val="1000"/>
+                <a:spcPts val="1100"/>
               </a:spcAft>
             </a:pPr>
             <a:r>
               <a:rPr sz="1600" b="1" i="0">
                 <a:solidFill>
-                  <a:srgbClr val="2E3A80"/>
-                </a:solidFill>
-                <a:latin typeface="Montserrat"/>
-              </a:rPr>
-              <a:t>•  </a:t>
+                  <a:srgbClr val="E8801A"/>
+                </a:solidFill>
+                <a:latin typeface="Montserrat"/>
+              </a:rPr>
+              <a:t>▸  </a:t>
             </a:r>
             <a:r>
               <a:rPr sz="1600" b="0" i="0">
@@ -6105,23 +6417,23 @@
                 </a:solidFill>
                 <a:latin typeface="Montserrat"/>
               </a:rPr>
-              <a:t>Tabla de aparatos, modelo IRG-3</a:t>
+              <a:t>Conexión rígida: siempre NO</a:t>
             </a:r>
           </a:p>
           <a:p>
             <a:pPr>
               <a:spcAft>
-                <a:spcPts val="1000"/>
+                <a:spcPts val="1100"/>
               </a:spcAft>
             </a:pPr>
             <a:r>
               <a:rPr sz="1600" b="1" i="0">
                 <a:solidFill>
-                  <a:srgbClr val="2E3A80"/>
-                </a:solidFill>
-                <a:latin typeface="Montserrat"/>
-              </a:rPr>
-              <a:t>•  </a:t>
+                  <a:srgbClr val="E8801A"/>
+                </a:solidFill>
+                <a:latin typeface="Montserrat"/>
+              </a:rPr>
+              <a:t>▸  </a:t>
             </a:r>
             <a:r>
               <a:rPr sz="1600" b="0" i="0">
@@ -6130,14 +6442,14 @@
                 </a:solidFill>
                 <a:latin typeface="Montserrat"/>
               </a:rPr>
-              <a:t>Se entrega al usuario</a:t>
-            </a:r>
-          </a:p>
-        </p:txBody>
-      </p:sp>
-      <p:sp>
-        <p:nvSpPr>
-          <p:cNvPr id="8" name="imgph" descr="IMGQ:technician filling gas installation certificate"/>
+              <a:t>Van con flexibles adecuados</a:t>
+            </a:r>
+          </a:p>
+        </p:txBody>
+      </p:sp>
+      <p:sp>
+        <p:nvSpPr>
+          <p:cNvPr id="9" name="imgph" descr="IMGQ:laboratory bunsen burner flame"/>
           <p:cNvSpPr/>
           <p:nvPr/>
         </p:nvSpPr>
@@ -6183,7 +6495,7 @@
       </p:sp>
       <p:sp>
         <p:nvSpPr>
-          <p:cNvPr id="9" name="TextBox 8"/>
+          <p:cNvPr id="10" name="TextBox 9"/>
           <p:cNvSpPr txBox="1"/>
           <p:nvPr/>
         </p:nvSpPr>
@@ -6223,7 +6535,7 @@
                 </a:solidFill>
                 <a:latin typeface="Montserrat"/>
               </a:rPr>
-              <a:t>technician filling gas installation certificate</a:t>
+              <a:t>laboratory bunsen burner flame</a:t>
             </a:r>
           </a:p>
         </p:txBody>
@@ -6261,6 +6573,440 @@
             <a:avLst/>
           </a:prstGeom>
           <a:solidFill>
+            <a:srgbClr val="FFFFFF"/>
+          </a:solidFill>
+          <a:ln>
+            <a:noFill/>
+          </a:ln>
+          <a:effectLst/>
+        </p:spPr>
+        <p:style>
+          <a:lnRef idx="1">
+            <a:schemeClr val="accent1"/>
+          </a:lnRef>
+          <a:fillRef idx="3">
+            <a:schemeClr val="accent1"/>
+          </a:fillRef>
+          <a:effectRef idx="2">
+            <a:schemeClr val="accent1"/>
+          </a:effectRef>
+          <a:fontRef idx="minor">
+            <a:schemeClr val="lt1"/>
+          </a:fontRef>
+        </p:style>
+        <p:txBody>
+          <a:bodyPr rtlCol="0" anchor="ctr"/>
+          <a:lstStyle/>
+          <a:p>
+            <a:pPr algn="ctr"/>
+          </a:p>
+        </p:txBody>
+      </p:sp>
+      <p:sp>
+        <p:nvSpPr>
+          <p:cNvPr id="3" name="TextBox 2"/>
+          <p:cNvSpPr txBox="1"/>
+          <p:nvPr/>
+        </p:nvSpPr>
+        <p:spPr>
+          <a:xfrm>
+            <a:off x="10607040" y="320040"/>
+            <a:ext cx="1371600" cy="365760"/>
+          </a:xfrm>
+          <a:prstGeom prst="rect">
+            <a:avLst/>
+          </a:prstGeom>
+          <a:noFill/>
+        </p:spPr>
+        <p:txBody>
+          <a:bodyPr wrap="square">
+            <a:spAutoFit/>
+          </a:bodyPr>
+          <a:lstStyle/>
+          <a:p>
+            <a:pPr algn="r"/>
+            <a:r>
+              <a:rPr sz="1000" b="1" i="0">
+                <a:solidFill>
+                  <a:srgbClr val="64748B"/>
+                </a:solidFill>
+                <a:latin typeface="Montserrat"/>
+              </a:rPr>
+              <a:t>014 / 015</a:t>
+            </a:r>
+          </a:p>
+        </p:txBody>
+      </p:sp>
+      <p:sp>
+        <p:nvSpPr>
+          <p:cNvPr id="4" name="TextBox 3"/>
+          <p:cNvSpPr txBox="1"/>
+          <p:nvPr/>
+        </p:nvSpPr>
+        <p:spPr>
+          <a:xfrm>
+            <a:off x="457200" y="6419088"/>
+            <a:ext cx="8229600" cy="365760"/>
+          </a:xfrm>
+          <a:prstGeom prst="rect">
+            <a:avLst/>
+          </a:prstGeom>
+          <a:noFill/>
+        </p:spPr>
+        <p:txBody>
+          <a:bodyPr wrap="square">
+            <a:spAutoFit/>
+          </a:bodyPr>
+          <a:lstStyle/>
+          <a:p>
+            <a:r>
+              <a:rPr sz="900" b="0" i="0">
+                <a:solidFill>
+                  <a:srgbClr val="64748B"/>
+                </a:solidFill>
+                <a:latin typeface="Montserrat"/>
+              </a:rPr>
+              <a:t>Curso Gas B · Tema 14 · UNE 60670-7</a:t>
+            </a:r>
+          </a:p>
+        </p:txBody>
+      </p:sp>
+      <p:sp>
+        <p:nvSpPr>
+          <p:cNvPr id="5" name="TextBox 4"/>
+          <p:cNvSpPr txBox="1"/>
+          <p:nvPr/>
+        </p:nvSpPr>
+        <p:spPr>
+          <a:xfrm>
+            <a:off x="822960" y="457200"/>
+            <a:ext cx="10058400" cy="365760"/>
+          </a:xfrm>
+          <a:prstGeom prst="rect">
+            <a:avLst/>
+          </a:prstGeom>
+          <a:noFill/>
+        </p:spPr>
+        <p:txBody>
+          <a:bodyPr wrap="square">
+            <a:spAutoFit/>
+          </a:bodyPr>
+          <a:lstStyle/>
+          <a:p>
+            <a:r>
+              <a:rPr sz="1300" b="1" i="0">
+                <a:solidFill>
+                  <a:srgbClr val="E8801A"/>
+                </a:solidFill>
+                <a:latin typeface="Montserrat"/>
+              </a:rPr>
+              <a:t>EL PAPELEO</a:t>
+            </a:r>
+          </a:p>
+        </p:txBody>
+      </p:sp>
+      <p:sp>
+        <p:nvSpPr>
+          <p:cNvPr id="6" name="TextBox 5"/>
+          <p:cNvSpPr txBox="1"/>
+          <p:nvPr/>
+        </p:nvSpPr>
+        <p:spPr>
+          <a:xfrm>
+            <a:off x="822960" y="868680"/>
+            <a:ext cx="10515600" cy="914400"/>
+          </a:xfrm>
+          <a:prstGeom prst="rect">
+            <a:avLst/>
+          </a:prstGeom>
+          <a:noFill/>
+        </p:spPr>
+        <p:txBody>
+          <a:bodyPr wrap="square">
+            <a:spAutoFit/>
+          </a:bodyPr>
+          <a:lstStyle/>
+          <a:p>
+            <a:r>
+              <a:rPr sz="2800" b="1" i="0">
+                <a:solidFill>
+                  <a:srgbClr val="1E2761"/>
+                </a:solidFill>
+                <a:latin typeface="Montserrat"/>
+              </a:rPr>
+              <a:t>Lo que firmas queda escrito</a:t>
+            </a:r>
+          </a:p>
+        </p:txBody>
+      </p:sp>
+      <p:sp>
+        <p:nvSpPr>
+          <p:cNvPr id="7" name="Rounded Rectangle 6"/>
+          <p:cNvSpPr/>
+          <p:nvPr/>
+        </p:nvSpPr>
+        <p:spPr>
+          <a:xfrm>
+            <a:off x="868680" y="1627632"/>
+            <a:ext cx="2011680" cy="73152"/>
+          </a:xfrm>
+          <a:prstGeom prst="roundRect">
+            <a:avLst/>
+          </a:prstGeom>
+          <a:solidFill>
+            <a:srgbClr val="E8801A"/>
+          </a:solidFill>
+          <a:ln>
+            <a:noFill/>
+          </a:ln>
+          <a:effectLst/>
+        </p:spPr>
+        <p:style>
+          <a:lnRef idx="1">
+            <a:schemeClr val="accent1"/>
+          </a:lnRef>
+          <a:fillRef idx="3">
+            <a:schemeClr val="accent1"/>
+          </a:fillRef>
+          <a:effectRef idx="2">
+            <a:schemeClr val="accent1"/>
+          </a:effectRef>
+          <a:fontRef idx="minor">
+            <a:schemeClr val="lt1"/>
+          </a:fontRef>
+        </p:style>
+        <p:txBody>
+          <a:bodyPr rtlCol="0" anchor="ctr"/>
+          <a:lstStyle/>
+          <a:p>
+            <a:pPr algn="ctr"/>
+          </a:p>
+        </p:txBody>
+      </p:sp>
+      <p:sp>
+        <p:nvSpPr>
+          <p:cNvPr id="8" name="TextBox 7"/>
+          <p:cNvSpPr txBox="1"/>
+          <p:nvPr/>
+        </p:nvSpPr>
+        <p:spPr>
+          <a:xfrm>
+            <a:off x="822960" y="1965960"/>
+            <a:ext cx="4983480" cy="4206240"/>
+          </a:xfrm>
+          <a:prstGeom prst="rect">
+            <a:avLst/>
+          </a:prstGeom>
+          <a:noFill/>
+        </p:spPr>
+        <p:txBody>
+          <a:bodyPr wrap="square">
+            <a:spAutoFit/>
+          </a:bodyPr>
+          <a:lstStyle/>
+          <a:p>
+            <a:pPr>
+              <a:spcAft>
+                <a:spcPts val="1100"/>
+              </a:spcAft>
+            </a:pPr>
+            <a:r>
+              <a:rPr sz="1600" b="1" i="0">
+                <a:solidFill>
+                  <a:srgbClr val="E8801A"/>
+                </a:solidFill>
+                <a:latin typeface="Montserrat"/>
+              </a:rPr>
+              <a:t>▸  </a:t>
+            </a:r>
+            <a:r>
+              <a:rPr sz="1600" b="0" i="0">
+                <a:solidFill>
+                  <a:srgbClr val="1B2330"/>
+                </a:solidFill>
+                <a:latin typeface="Montserrat"/>
+              </a:rPr>
+              <a:t>Certificado de instalación (el boletín)</a:t>
+            </a:r>
+          </a:p>
+          <a:p>
+            <a:pPr>
+              <a:spcAft>
+                <a:spcPts val="1100"/>
+              </a:spcAft>
+            </a:pPr>
+            <a:r>
+              <a:rPr sz="1600" b="1" i="0">
+                <a:solidFill>
+                  <a:srgbClr val="E8801A"/>
+                </a:solidFill>
+                <a:latin typeface="Montserrat"/>
+              </a:rPr>
+              <a:t>▸  </a:t>
+            </a:r>
+            <a:r>
+              <a:rPr sz="1600" b="0" i="0">
+                <a:solidFill>
+                  <a:srgbClr val="1B2330"/>
+                </a:solidFill>
+                <a:latin typeface="Montserrat"/>
+              </a:rPr>
+              <a:t>Tabla de aparatos, modelo IRG-3</a:t>
+            </a:r>
+          </a:p>
+          <a:p>
+            <a:pPr>
+              <a:spcAft>
+                <a:spcPts val="1100"/>
+              </a:spcAft>
+            </a:pPr>
+            <a:r>
+              <a:rPr sz="1600" b="1" i="0">
+                <a:solidFill>
+                  <a:srgbClr val="E8801A"/>
+                </a:solidFill>
+                <a:latin typeface="Montserrat"/>
+              </a:rPr>
+              <a:t>▸  </a:t>
+            </a:r>
+            <a:r>
+              <a:rPr sz="1600" b="0" i="0">
+                <a:solidFill>
+                  <a:srgbClr val="1B2330"/>
+                </a:solidFill>
+                <a:latin typeface="Montserrat"/>
+              </a:rPr>
+              <a:t>Se entrega al usuario</a:t>
+            </a:r>
+          </a:p>
+        </p:txBody>
+      </p:sp>
+      <p:sp>
+        <p:nvSpPr>
+          <p:cNvPr id="9" name="imgph" descr="IMGQ:technician filling gas installation certificate"/>
+          <p:cNvSpPr/>
+          <p:nvPr/>
+        </p:nvSpPr>
+        <p:spPr>
+          <a:xfrm>
+            <a:off x="5806440" y="1051560"/>
+            <a:ext cx="5298947" cy="4629150"/>
+          </a:xfrm>
+          <a:prstGeom prst="roundRect">
+            <a:avLst/>
+          </a:prstGeom>
+          <a:solidFill>
+            <a:srgbClr val="F3F6FB"/>
+          </a:solidFill>
+          <a:ln w="12700">
+            <a:solidFill>
+              <a:srgbClr val="C7D2E6"/>
+            </a:solidFill>
+          </a:ln>
+          <a:effectLst/>
+        </p:spPr>
+        <p:style>
+          <a:lnRef idx="1">
+            <a:schemeClr val="accent1"/>
+          </a:lnRef>
+          <a:fillRef idx="3">
+            <a:schemeClr val="accent1"/>
+          </a:fillRef>
+          <a:effectRef idx="2">
+            <a:schemeClr val="accent1"/>
+          </a:effectRef>
+          <a:fontRef idx="minor">
+            <a:schemeClr val="lt1"/>
+          </a:fontRef>
+        </p:style>
+        <p:txBody>
+          <a:bodyPr rtlCol="0" anchor="ctr"/>
+          <a:lstStyle/>
+          <a:p>
+            <a:pPr algn="ctr"/>
+          </a:p>
+        </p:txBody>
+      </p:sp>
+      <p:sp>
+        <p:nvSpPr>
+          <p:cNvPr id="10" name="TextBox 9"/>
+          <p:cNvSpPr txBox="1"/>
+          <p:nvPr/>
+        </p:nvSpPr>
+        <p:spPr>
+          <a:xfrm>
+            <a:off x="6080760" y="2726055"/>
+            <a:ext cx="4750307" cy="1280160"/>
+          </a:xfrm>
+          <a:prstGeom prst="rect">
+            <a:avLst/>
+          </a:prstGeom>
+          <a:noFill/>
+        </p:spPr>
+        <p:txBody>
+          <a:bodyPr wrap="square">
+            <a:spAutoFit/>
+          </a:bodyPr>
+          <a:lstStyle/>
+          <a:p>
+            <a:pPr algn="ctr"/>
+            <a:r>
+              <a:rPr sz="1400" b="1" i="0">
+                <a:solidFill>
+                  <a:srgbClr val="64748B"/>
+                </a:solidFill>
+                <a:latin typeface="Montserrat"/>
+              </a:rPr>
+              <a:t>IMAGEN REALISTA</a:t>
+            </a:r>
+          </a:p>
+          <a:p>
+            <a:pPr algn="ctr"/>
+            <a:r>
+              <a:rPr sz="1100" b="0" i="1">
+                <a:solidFill>
+                  <a:srgbClr val="64748B"/>
+                </a:solidFill>
+                <a:latin typeface="Montserrat"/>
+              </a:rPr>
+              <a:t>technician filling gas installation certificate</a:t>
+            </a:r>
+          </a:p>
+        </p:txBody>
+      </p:sp>
+    </p:spTree>
+  </p:cSld>
+  <p:clrMapOvr>
+    <a:masterClrMapping/>
+  </p:clrMapOvr>
+</p:sld>
+</file>
+
+<file path=ppt/slides/slide15.xml><?xml version="1.0" encoding="utf-8"?>
+<p:sld xmlns:a="http://schemas.openxmlformats.org/drawingml/2006/main" xmlns:p="http://schemas.openxmlformats.org/presentationml/2006/main" xmlns:r="http://schemas.openxmlformats.org/officeDocument/2006/relationships">
+  <p:cSld>
+    <p:spTree>
+      <p:nvGrpSpPr>
+        <p:cNvPr id="1" name=""/>
+        <p:cNvGrpSpPr/>
+        <p:nvPr/>
+      </p:nvGrpSpPr>
+      <p:grpSpPr/>
+      <p:sp>
+        <p:nvSpPr>
+          <p:cNvPr id="2" name="Rectangle 1"/>
+          <p:cNvSpPr/>
+          <p:nvPr/>
+        </p:nvSpPr>
+        <p:spPr>
+          <a:xfrm>
+            <a:off x="0" y="0"/>
+            <a:ext cx="12191695" cy="6858000"/>
+          </a:xfrm>
+          <a:prstGeom prst="rect">
+            <a:avLst/>
+          </a:prstGeom>
+          <a:solidFill>
             <a:srgbClr val="1E2761"/>
           </a:solidFill>
           <a:ln>
@@ -6315,7 +7061,7 @@
             <a:r>
               <a:rPr sz="1400" b="1" i="0">
                 <a:solidFill>
-                  <a:srgbClr val="CADCFC"/>
+                  <a:srgbClr val="F4A24C"/>
                 </a:solidFill>
                 <a:latin typeface="Montserrat"/>
               </a:rPr>
@@ -6326,13 +7072,57 @@
       </p:sp>
       <p:sp>
         <p:nvSpPr>
-          <p:cNvPr id="4" name="TextBox 3"/>
+          <p:cNvPr id="4" name="Rounded Rectangle 3"/>
+          <p:cNvSpPr/>
+          <p:nvPr/>
+        </p:nvSpPr>
+        <p:spPr>
+          <a:xfrm>
+            <a:off x="868680" y="1051560"/>
+            <a:ext cx="1463040" cy="82296"/>
+          </a:xfrm>
+          <a:prstGeom prst="roundRect">
+            <a:avLst/>
+          </a:prstGeom>
+          <a:solidFill>
+            <a:srgbClr val="E8801A"/>
+          </a:solidFill>
+          <a:ln>
+            <a:noFill/>
+          </a:ln>
+          <a:effectLst/>
+        </p:spPr>
+        <p:style>
+          <a:lnRef idx="1">
+            <a:schemeClr val="accent1"/>
+          </a:lnRef>
+          <a:fillRef idx="3">
+            <a:schemeClr val="accent1"/>
+          </a:fillRef>
+          <a:effectRef idx="2">
+            <a:schemeClr val="accent1"/>
+          </a:effectRef>
+          <a:fontRef idx="minor">
+            <a:schemeClr val="lt1"/>
+          </a:fontRef>
+        </p:style>
+        <p:txBody>
+          <a:bodyPr rtlCol="0" anchor="ctr"/>
+          <a:lstStyle/>
+          <a:p>
+            <a:pPr algn="ctr"/>
+          </a:p>
+        </p:txBody>
+      </p:sp>
+      <p:sp>
+        <p:nvSpPr>
+          <p:cNvPr id="5" name="TextBox 4"/>
           <p:cNvSpPr txBox="1"/>
           <p:nvPr/>
         </p:nvSpPr>
         <p:spPr>
           <a:xfrm>
-            <a:off x="822960" y="1143000"/>
+            <a:off x="822960" y="1234440"/>
             <a:ext cx="10515600" cy="1097280"/>
           </a:xfrm>
           <a:prstGeom prst="rect">
@@ -6360,14 +7150,14 @@
       </p:sp>
       <p:sp>
         <p:nvSpPr>
-          <p:cNvPr id="5" name="TextBox 4"/>
+          <p:cNvPr id="6" name="TextBox 5"/>
           <p:cNvSpPr txBox="1"/>
           <p:nvPr/>
         </p:nvSpPr>
         <p:spPr>
           <a:xfrm>
-            <a:off x="822960" y="2514600"/>
-            <a:ext cx="10515600" cy="2834640"/>
+            <a:off x="822960" y="2606040"/>
+            <a:ext cx="10515600" cy="2743200"/>
           </a:xfrm>
           <a:prstGeom prst="rect">
             <a:avLst/>
@@ -6388,7 +7178,7 @@
             <a:r>
               <a:rPr sz="2000" b="1" i="0">
                 <a:solidFill>
-                  <a:srgbClr val="CADCFC"/>
+                  <a:srgbClr val="F4A24C"/>
                 </a:solidFill>
                 <a:latin typeface="Montserrat"/>
               </a:rPr>
@@ -6413,7 +7203,7 @@
             <a:r>
               <a:rPr sz="2000" b="1" i="0">
                 <a:solidFill>
-                  <a:srgbClr val="CADCFC"/>
+                  <a:srgbClr val="F4A24C"/>
                 </a:solidFill>
                 <a:latin typeface="Montserrat"/>
               </a:rPr>
@@ -6438,7 +7228,7 @@
             <a:r>
               <a:rPr sz="2000" b="1" i="0">
                 <a:solidFill>
-                  <a:srgbClr val="CADCFC"/>
+                  <a:srgbClr val="F4A24C"/>
                 </a:solidFill>
                 <a:latin typeface="Montserrat"/>
               </a:rPr>
@@ -6463,7 +7253,7 @@
             <a:r>
               <a:rPr sz="2000" b="1" i="0">
                 <a:solidFill>
-                  <a:srgbClr val="CADCFC"/>
+                  <a:srgbClr val="F4A24C"/>
                 </a:solidFill>
                 <a:latin typeface="Montserrat"/>
               </a:rPr>
@@ -6483,20 +7273,20 @@
       </p:sp>
       <p:sp>
         <p:nvSpPr>
-          <p:cNvPr id="6" name="Rounded Rectangle 5"/>
+          <p:cNvPr id="7" name="Rounded Rectangle 6"/>
           <p:cNvSpPr/>
           <p:nvPr/>
         </p:nvSpPr>
         <p:spPr>
           <a:xfrm>
             <a:off x="822960" y="5532120"/>
-            <a:ext cx="10515600" cy="777240"/>
+            <a:ext cx="10515600" cy="822960"/>
           </a:xfrm>
           <a:prstGeom prst="roundRect">
             <a:avLst/>
           </a:prstGeom>
           <a:solidFill>
-            <a:srgbClr val="2E3A80"/>
+            <a:srgbClr val="E8801A"/>
           </a:solidFill>
           <a:ln>
             <a:noFill/>
@@ -6527,13 +7317,13 @@
       </p:sp>
       <p:sp>
         <p:nvSpPr>
-          <p:cNvPr id="7" name="TextBox 6"/>
+          <p:cNvPr id="8" name="TextBox 7"/>
           <p:cNvSpPr txBox="1"/>
           <p:nvPr/>
         </p:nvSpPr>
         <p:spPr>
           <a:xfrm>
-            <a:off x="1051560" y="5605272"/>
+            <a:off x="1051560" y="5623560"/>
             <a:ext cx="10058400" cy="640080"/>
           </a:xfrm>
           <a:prstGeom prst="rect">
@@ -6550,7 +7340,7 @@
             <a:r>
               <a:rPr sz="1500" b="1" i="1">
                 <a:solidFill>
-                  <a:srgbClr val="CADCFC"/>
+                  <a:srgbClr val="1E2761"/>
                 </a:solidFill>
                 <a:latin typeface="Montserrat"/>
               </a:rPr>
@@ -6651,7 +7441,7 @@
                 </a:solidFill>
                 <a:latin typeface="Montserrat"/>
               </a:rPr>
-              <a:t>002 / 014</a:t>
+              <a:t>002 / 015</a:t>
             </a:r>
           </a:p>
         </p:txBody>
@@ -6715,7 +7505,7 @@
             <a:r>
               <a:rPr sz="2700" b="1" i="0">
                 <a:solidFill>
-                  <a:srgbClr val="1E2761"/>
+                  <a:srgbClr val="E8801A"/>
                 </a:solidFill>
                 <a:latin typeface="Montserrat"/>
               </a:rPr>
@@ -6727,6 +7517,50 @@
       <p:sp>
         <p:nvSpPr>
           <p:cNvPr id="6" name="Rounded Rectangle 5"/>
+          <p:cNvSpPr/>
+          <p:nvPr/>
+        </p:nvSpPr>
+        <p:spPr>
+          <a:xfrm>
+            <a:off x="868680" y="1234440"/>
+            <a:ext cx="1463040" cy="73152"/>
+          </a:xfrm>
+          <a:prstGeom prst="roundRect">
+            <a:avLst/>
+          </a:prstGeom>
+          <a:solidFill>
+            <a:srgbClr val="1E2761"/>
+          </a:solidFill>
+          <a:ln>
+            <a:noFill/>
+          </a:ln>
+          <a:effectLst/>
+        </p:spPr>
+        <p:style>
+          <a:lnRef idx="1">
+            <a:schemeClr val="accent1"/>
+          </a:lnRef>
+          <a:fillRef idx="3">
+            <a:schemeClr val="accent1"/>
+          </a:fillRef>
+          <a:effectRef idx="2">
+            <a:schemeClr val="accent1"/>
+          </a:effectRef>
+          <a:fontRef idx="minor">
+            <a:schemeClr val="lt1"/>
+          </a:fontRef>
+        </p:style>
+        <p:txBody>
+          <a:bodyPr rtlCol="0" anchor="ctr"/>
+          <a:lstStyle/>
+          <a:p>
+            <a:pPr algn="ctr"/>
+          </a:p>
+        </p:txBody>
+      </p:sp>
+      <p:sp>
+        <p:nvSpPr>
+          <p:cNvPr id="7" name="Rounded Rectangle 6"/>
           <p:cNvSpPr/>
           <p:nvPr/>
         </p:nvSpPr>
@@ -6772,7 +7606,7 @@
       </p:sp>
       <p:sp>
         <p:nvSpPr>
-          <p:cNvPr id="7" name="TextBox 6"/>
+          <p:cNvPr id="8" name="TextBox 7"/>
           <p:cNvSpPr txBox="1"/>
           <p:nvPr/>
         </p:nvSpPr>
@@ -6807,7 +7641,7 @@
       </p:sp>
       <p:sp>
         <p:nvSpPr>
-          <p:cNvPr id="8" name="TextBox 7"/>
+          <p:cNvPr id="9" name="TextBox 8"/>
           <p:cNvSpPr txBox="1"/>
           <p:nvPr/>
         </p:nvSpPr>
@@ -6842,7 +7676,7 @@
       </p:sp>
       <p:sp>
         <p:nvSpPr>
-          <p:cNvPr id="9" name="Rounded Rectangle 8"/>
+          <p:cNvPr id="10" name="Rounded Rectangle 9"/>
           <p:cNvSpPr/>
           <p:nvPr/>
         </p:nvSpPr>
@@ -6888,7 +7722,7 @@
       </p:sp>
       <p:sp>
         <p:nvSpPr>
-          <p:cNvPr id="10" name="TextBox 9"/>
+          <p:cNvPr id="11" name="TextBox 10"/>
           <p:cNvSpPr txBox="1"/>
           <p:nvPr/>
         </p:nvSpPr>
@@ -6923,7 +7757,7 @@
       </p:sp>
       <p:sp>
         <p:nvSpPr>
-          <p:cNvPr id="11" name="TextBox 10"/>
+          <p:cNvPr id="12" name="TextBox 11"/>
           <p:cNvSpPr txBox="1"/>
           <p:nvPr/>
         </p:nvSpPr>
@@ -6958,7 +7792,7 @@
       </p:sp>
       <p:sp>
         <p:nvSpPr>
-          <p:cNvPr id="12" name="Rounded Rectangle 11"/>
+          <p:cNvPr id="13" name="Rounded Rectangle 12"/>
           <p:cNvSpPr/>
           <p:nvPr/>
         </p:nvSpPr>
@@ -7004,7 +7838,7 @@
       </p:sp>
       <p:sp>
         <p:nvSpPr>
-          <p:cNvPr id="13" name="TextBox 12"/>
+          <p:cNvPr id="14" name="TextBox 13"/>
           <p:cNvSpPr txBox="1"/>
           <p:nvPr/>
         </p:nvSpPr>
@@ -7039,7 +7873,7 @@
       </p:sp>
       <p:sp>
         <p:nvSpPr>
-          <p:cNvPr id="14" name="TextBox 13"/>
+          <p:cNvPr id="15" name="TextBox 14"/>
           <p:cNvSpPr txBox="1"/>
           <p:nvPr/>
         </p:nvSpPr>
@@ -7164,7 +7998,7 @@
                 </a:solidFill>
                 <a:latin typeface="Montserrat"/>
               </a:rPr>
-              <a:t>003 / 014</a:t>
+              <a:t>003 / 015</a:t>
             </a:r>
           </a:p>
         </p:txBody>
@@ -7211,7 +8045,7 @@
         </p:nvSpPr>
         <p:spPr>
           <a:xfrm>
-            <a:off x="822960" y="457200"/>
+            <a:off x="822960" y="502920"/>
             <a:ext cx="8229600" cy="365760"/>
           </a:xfrm>
           <a:prstGeom prst="rect">
@@ -7226,13 +8060,13 @@
           <a:lstStyle/>
           <a:p>
             <a:r>
-              <a:rPr sz="1200" b="1" i="0">
-                <a:solidFill>
-                  <a:srgbClr val="64748B"/>
-                </a:solidFill>
-                <a:latin typeface="Montserrat"/>
-              </a:rPr>
-              <a:t>UNE 60670 · GENERALIDADES</a:t>
+              <a:rPr sz="1300" b="1" i="0">
+                <a:solidFill>
+                  <a:srgbClr val="E8801A"/>
+                </a:solidFill>
+                <a:latin typeface="Montserrat"/>
+              </a:rPr>
+              <a:t>PARTES DE ESTE VÍDEO</a:t>
             </a:r>
           </a:p>
         </p:txBody>
@@ -7245,7 +8079,7 @@
         </p:nvSpPr>
         <p:spPr>
           <a:xfrm>
-            <a:off x="822960" y="868680"/>
+            <a:off x="822960" y="914400"/>
             <a:ext cx="10515600" cy="914400"/>
           </a:xfrm>
           <a:prstGeom prst="rect">
@@ -7266,130 +8100,30 @@
                 </a:solidFill>
                 <a:latin typeface="Montserrat"/>
               </a:rPr>
-              <a:t>Una norma en trece partes</a:t>
-            </a:r>
-          </a:p>
-        </p:txBody>
-      </p:sp>
-      <p:sp>
-        <p:nvSpPr>
-          <p:cNvPr id="7" name="TextBox 6"/>
-          <p:cNvSpPr txBox="1"/>
-          <p:nvPr/>
-        </p:nvSpPr>
-        <p:spPr>
-          <a:xfrm>
-            <a:off x="822960" y="1920240"/>
-            <a:ext cx="4983480" cy="4206240"/>
-          </a:xfrm>
-          <a:prstGeom prst="rect">
-            <a:avLst/>
-          </a:prstGeom>
-          <a:noFill/>
-        </p:spPr>
-        <p:txBody>
-          <a:bodyPr wrap="square">
-            <a:spAutoFit/>
-          </a:bodyPr>
-          <a:lstStyle/>
-          <a:p>
-            <a:pPr>
-              <a:spcAft>
-                <a:spcPts val="1000"/>
-              </a:spcAft>
-            </a:pPr>
-            <a:r>
-              <a:rPr sz="1600" b="1" i="0">
-                <a:solidFill>
-                  <a:srgbClr val="2E3A80"/>
-                </a:solidFill>
-                <a:latin typeface="Montserrat"/>
-              </a:rPr>
-              <a:t>•  </a:t>
-            </a:r>
-            <a:r>
-              <a:rPr sz="1600" b="0" i="0">
-                <a:solidFill>
-                  <a:srgbClr val="1B2330"/>
-                </a:solidFill>
-                <a:latin typeface="Montserrat"/>
-              </a:rPr>
-              <a:t>Diseñar, montar, probar y revisar</a:t>
-            </a:r>
-          </a:p>
-          <a:p>
-            <a:pPr>
-              <a:spcAft>
-                <a:spcPts val="1000"/>
-              </a:spcAft>
-            </a:pPr>
-            <a:r>
-              <a:rPr sz="1600" b="1" i="0">
-                <a:solidFill>
-                  <a:srgbClr val="2E3A80"/>
-                </a:solidFill>
-                <a:latin typeface="Montserrat"/>
-              </a:rPr>
-              <a:t>•  </a:t>
-            </a:r>
-            <a:r>
-              <a:rPr sz="1600" b="0" i="0">
-                <a:solidFill>
-                  <a:srgbClr val="1B2330"/>
-                </a:solidFill>
-                <a:latin typeface="Montserrat"/>
-              </a:rPr>
-              <a:t>Instalaciones receptoras MOP ≤ 5 bar</a:t>
-            </a:r>
-          </a:p>
-          <a:p>
-            <a:pPr>
-              <a:spcAft>
-                <a:spcPts val="1000"/>
-              </a:spcAft>
-            </a:pPr>
-            <a:r>
-              <a:rPr sz="1600" b="1" i="0">
-                <a:solidFill>
-                  <a:srgbClr val="2E3A80"/>
-                </a:solidFill>
-                <a:latin typeface="Montserrat"/>
-              </a:rPr>
-              <a:t>•  </a:t>
-            </a:r>
-            <a:r>
-              <a:rPr sz="1600" b="0" i="0">
-                <a:solidFill>
-                  <a:srgbClr val="1B2330"/>
-                </a:solidFill>
-                <a:latin typeface="Montserrat"/>
-              </a:rPr>
-              <a:t>Parte 7: instalar y conectar aparatos</a:t>
-            </a:r>
-          </a:p>
-        </p:txBody>
-      </p:sp>
-      <p:sp>
-        <p:nvSpPr>
-          <p:cNvPr id="8" name="imgph" descr="IMGQ:gas boiler installation on kitchen wall"/>
+              <a:t>En este vídeo</a:t>
+            </a:r>
+          </a:p>
+        </p:txBody>
+      </p:sp>
+      <p:sp>
+        <p:nvSpPr>
+          <p:cNvPr id="7" name="Rounded Rectangle 6"/>
           <p:cNvSpPr/>
           <p:nvPr/>
         </p:nvSpPr>
         <p:spPr>
           <a:xfrm>
-            <a:off x="5806440" y="1051560"/>
-            <a:ext cx="5298947" cy="4629150"/>
+            <a:off x="868680" y="1673352"/>
+            <a:ext cx="2011680" cy="73152"/>
           </a:xfrm>
           <a:prstGeom prst="roundRect">
             <a:avLst/>
           </a:prstGeom>
           <a:solidFill>
-            <a:srgbClr val="F3F6FB"/>
+            <a:srgbClr val="E8801A"/>
           </a:solidFill>
-          <a:ln w="12700">
-            <a:solidFill>
-              <a:srgbClr val="C7D2E6"/>
-            </a:solidFill>
+          <a:ln>
+            <a:noFill/>
           </a:ln>
           <a:effectLst/>
         </p:spPr>
@@ -7417,14 +8151,14 @@
       </p:sp>
       <p:sp>
         <p:nvSpPr>
-          <p:cNvPr id="9" name="TextBox 8"/>
+          <p:cNvPr id="8" name="TextBox 7"/>
           <p:cNvSpPr txBox="1"/>
           <p:nvPr/>
         </p:nvSpPr>
         <p:spPr>
           <a:xfrm>
-            <a:off x="6080760" y="2726055"/>
-            <a:ext cx="4750307" cy="1280160"/>
+            <a:off x="822960" y="2103120"/>
+            <a:ext cx="10515600" cy="4023360"/>
           </a:xfrm>
           <a:prstGeom prst="rect">
             <a:avLst/>
@@ -7437,27 +8171,228 @@
           </a:bodyPr>
           <a:lstStyle/>
           <a:p>
-            <a:pPr algn="ctr"/>
-            <a:r>
-              <a:rPr sz="1400" b="1" i="0">
-                <a:solidFill>
-                  <a:srgbClr val="64748B"/>
-                </a:solidFill>
-                <a:latin typeface="Montserrat"/>
-              </a:rPr>
-              <a:t>IMAGEN REALISTA</a:t>
-            </a:r>
-          </a:p>
-          <a:p>
-            <a:pPr algn="ctr"/>
-            <a:r>
-              <a:rPr sz="1100" b="0" i="1">
-                <a:solidFill>
-                  <a:srgbClr val="64748B"/>
-                </a:solidFill>
-                <a:latin typeface="Montserrat"/>
-              </a:rPr>
-              <a:t>gas boiler installation on kitchen wall</a:t>
+            <a:pPr>
+              <a:spcAft>
+                <a:spcPts val="900"/>
+              </a:spcAft>
+            </a:pPr>
+            <a:r>
+              <a:rPr sz="1800" b="1" i="0">
+                <a:solidFill>
+                  <a:srgbClr val="E8801A"/>
+                </a:solidFill>
+                <a:latin typeface="Montserrat"/>
+              </a:rPr>
+              <a:t>01   </a:t>
+            </a:r>
+            <a:r>
+              <a:rPr sz="1700" b="0" i="0">
+                <a:solidFill>
+                  <a:srgbClr val="1B2330"/>
+                </a:solidFill>
+                <a:latin typeface="Montserrat"/>
+              </a:rPr>
+              <a:t>UNE 60670</a:t>
+            </a:r>
+          </a:p>
+          <a:p>
+            <a:pPr>
+              <a:spcAft>
+                <a:spcPts val="900"/>
+              </a:spcAft>
+            </a:pPr>
+            <a:r>
+              <a:rPr sz="1800" b="1" i="0">
+                <a:solidFill>
+                  <a:srgbClr val="E8801A"/>
+                </a:solidFill>
+                <a:latin typeface="Montserrat"/>
+              </a:rPr>
+              <a:t>02   </a:t>
+            </a:r>
+            <a:r>
+              <a:rPr sz="1700" b="0" i="0">
+                <a:solidFill>
+                  <a:srgbClr val="1B2330"/>
+                </a:solidFill>
+                <a:latin typeface="Montserrat"/>
+              </a:rPr>
+              <a:t>Parte 7</a:t>
+            </a:r>
+          </a:p>
+          <a:p>
+            <a:pPr>
+              <a:spcAft>
+                <a:spcPts val="900"/>
+              </a:spcAft>
+            </a:pPr>
+            <a:r>
+              <a:rPr sz="1800" b="1" i="0">
+                <a:solidFill>
+                  <a:srgbClr val="E8801A"/>
+                </a:solidFill>
+                <a:latin typeface="Montserrat"/>
+              </a:rPr>
+              <a:t>03   </a:t>
+            </a:r>
+            <a:r>
+              <a:rPr sz="1700" b="0" i="0">
+                <a:solidFill>
+                  <a:srgbClr val="1B2330"/>
+                </a:solidFill>
+                <a:latin typeface="Montserrat"/>
+              </a:rPr>
+              <a:t>Campo de aplicación</a:t>
+            </a:r>
+          </a:p>
+          <a:p>
+            <a:pPr>
+              <a:spcAft>
+                <a:spcPts val="900"/>
+              </a:spcAft>
+            </a:pPr>
+            <a:r>
+              <a:rPr sz="1800" b="1" i="0">
+                <a:solidFill>
+                  <a:srgbClr val="E8801A"/>
+                </a:solidFill>
+                <a:latin typeface="Montserrat"/>
+              </a:rPr>
+              <a:t>04   </a:t>
+            </a:r>
+            <a:r>
+              <a:rPr sz="1700" b="0" i="0">
+                <a:solidFill>
+                  <a:srgbClr val="1B2330"/>
+                </a:solidFill>
+                <a:latin typeface="Montserrat"/>
+              </a:rPr>
+              <a:t>Ubicación de aparatos</a:t>
+            </a:r>
+          </a:p>
+          <a:p>
+            <a:pPr>
+              <a:spcAft>
+                <a:spcPts val="900"/>
+              </a:spcAft>
+            </a:pPr>
+            <a:r>
+              <a:rPr sz="1800" b="1" i="0">
+                <a:solidFill>
+                  <a:srgbClr val="E8801A"/>
+                </a:solidFill>
+                <a:latin typeface="Montserrat"/>
+              </a:rPr>
+              <a:t>05   </a:t>
+            </a:r>
+            <a:r>
+              <a:rPr sz="1700" b="0" i="0">
+                <a:solidFill>
+                  <a:srgbClr val="1B2330"/>
+                </a:solidFill>
+                <a:latin typeface="Montserrat"/>
+              </a:rPr>
+              <a:t>Distancia al calor</a:t>
+            </a:r>
+          </a:p>
+          <a:p>
+            <a:pPr>
+              <a:spcAft>
+                <a:spcPts val="900"/>
+              </a:spcAft>
+            </a:pPr>
+            <a:r>
+              <a:rPr sz="1800" b="1" i="0">
+                <a:solidFill>
+                  <a:srgbClr val="E8801A"/>
+                </a:solidFill>
+                <a:latin typeface="Montserrat"/>
+              </a:rPr>
+              <a:t>06   </a:t>
+            </a:r>
+            <a:r>
+              <a:rPr sz="1700" b="0" i="0">
+                <a:solidFill>
+                  <a:srgbClr val="1B2330"/>
+                </a:solidFill>
+                <a:latin typeface="Montserrat"/>
+              </a:rPr>
+              <a:t>Tipos de conexión</a:t>
+            </a:r>
+          </a:p>
+          <a:p>
+            <a:pPr>
+              <a:spcAft>
+                <a:spcPts val="900"/>
+              </a:spcAft>
+            </a:pPr>
+            <a:r>
+              <a:rPr sz="1800" b="1" i="0">
+                <a:solidFill>
+                  <a:srgbClr val="E8801A"/>
+                </a:solidFill>
+                <a:latin typeface="Montserrat"/>
+              </a:rPr>
+              <a:t>07   </a:t>
+            </a:r>
+            <a:r>
+              <a:rPr sz="1700" b="0" i="0">
+                <a:solidFill>
+                  <a:srgbClr val="1B2330"/>
+                </a:solidFill>
+                <a:latin typeface="Montserrat"/>
+              </a:rPr>
+              <a:t>Tabla 1</a:t>
+            </a:r>
+          </a:p>
+          <a:p>
+            <a:pPr>
+              <a:spcAft>
+                <a:spcPts val="900"/>
+              </a:spcAft>
+            </a:pPr>
+            <a:r>
+              <a:rPr sz="1800" b="1" i="0">
+                <a:solidFill>
+                  <a:srgbClr val="E8801A"/>
+                </a:solidFill>
+                <a:latin typeface="Montserrat"/>
+              </a:rPr>
+              <a:t>08   </a:t>
+            </a:r>
+            <a:r>
+              <a:rPr sz="1700" b="0" i="0">
+                <a:solidFill>
+                  <a:srgbClr val="1B2330"/>
+                </a:solidFill>
+                <a:latin typeface="Montserrat"/>
+              </a:rPr>
+              <a:t>Concepto clave</a:t>
+            </a:r>
+          </a:p>
+          <a:p>
+            <a:pPr>
+              <a:spcAft>
+                <a:spcPts val="900"/>
+              </a:spcAft>
+            </a:pPr>
+            <a:r>
+              <a:rPr sz="1800" b="1" i="0">
+                <a:solidFill>
+                  <a:srgbClr val="E8801A"/>
+                </a:solidFill>
+                <a:latin typeface="Montserrat"/>
+              </a:rPr>
+              <a:t>09   </a:t>
+            </a:r>
+            <a:r>
+              <a:rPr sz="1700" b="0" i="0">
+                <a:solidFill>
+                  <a:srgbClr val="1B2330"/>
+                </a:solidFill>
+                <a:latin typeface="Montserrat"/>
+              </a:rPr>
+              <a:t>Tabla 2</a:t>
             </a:r>
           </a:p>
         </p:txBody>
@@ -7554,7 +8489,7 @@
                 </a:solidFill>
                 <a:latin typeface="Montserrat"/>
               </a:rPr>
-              <a:t>004 / 014</a:t>
+              <a:t>004 / 015</a:t>
             </a:r>
           </a:p>
         </p:txBody>
@@ -7602,7 +8537,7 @@
         <p:spPr>
           <a:xfrm>
             <a:off x="822960" y="457200"/>
-            <a:ext cx="8229600" cy="365760"/>
+            <a:ext cx="10058400" cy="365760"/>
           </a:xfrm>
           <a:prstGeom prst="rect">
             <a:avLst/>
@@ -7616,13 +8551,13 @@
           <a:lstStyle/>
           <a:p>
             <a:r>
-              <a:rPr sz="1200" b="1" i="0">
-                <a:solidFill>
-                  <a:srgbClr val="64748B"/>
-                </a:solidFill>
-                <a:latin typeface="Montserrat"/>
-              </a:rPr>
-              <a:t>PARTE 7 · OBJETO</a:t>
+              <a:rPr sz="1300" b="1" i="0">
+                <a:solidFill>
+                  <a:srgbClr val="E8801A"/>
+                </a:solidFill>
+                <a:latin typeface="Montserrat"/>
+              </a:rPr>
+              <a:t>UNE 60670 · GENERALIDADES</a:t>
             </a:r>
           </a:p>
         </p:txBody>
@@ -7650,26 +8585,70 @@
           <a:lstStyle/>
           <a:p>
             <a:r>
-              <a:rPr sz="2700" b="1" i="0">
+              <a:rPr sz="2800" b="1" i="0">
                 <a:solidFill>
                   <a:srgbClr val="1E2761"/>
                 </a:solidFill>
                 <a:latin typeface="Montserrat"/>
               </a:rPr>
-              <a:t>El último metro del gas</a:t>
-            </a:r>
-          </a:p>
-        </p:txBody>
-      </p:sp>
-      <p:sp>
-        <p:nvSpPr>
-          <p:cNvPr id="7" name="TextBox 6"/>
+              <a:t>Una norma en trece partes</a:t>
+            </a:r>
+          </a:p>
+        </p:txBody>
+      </p:sp>
+      <p:sp>
+        <p:nvSpPr>
+          <p:cNvPr id="7" name="Rounded Rectangle 6"/>
+          <p:cNvSpPr/>
+          <p:nvPr/>
+        </p:nvSpPr>
+        <p:spPr>
+          <a:xfrm>
+            <a:off x="868680" y="1627632"/>
+            <a:ext cx="2011680" cy="73152"/>
+          </a:xfrm>
+          <a:prstGeom prst="roundRect">
+            <a:avLst/>
+          </a:prstGeom>
+          <a:solidFill>
+            <a:srgbClr val="E8801A"/>
+          </a:solidFill>
+          <a:ln>
+            <a:noFill/>
+          </a:ln>
+          <a:effectLst/>
+        </p:spPr>
+        <p:style>
+          <a:lnRef idx="1">
+            <a:schemeClr val="accent1"/>
+          </a:lnRef>
+          <a:fillRef idx="3">
+            <a:schemeClr val="accent1"/>
+          </a:fillRef>
+          <a:effectRef idx="2">
+            <a:schemeClr val="accent1"/>
+          </a:effectRef>
+          <a:fontRef idx="minor">
+            <a:schemeClr val="lt1"/>
+          </a:fontRef>
+        </p:style>
+        <p:txBody>
+          <a:bodyPr rtlCol="0" anchor="ctr"/>
+          <a:lstStyle/>
+          <a:p>
+            <a:pPr algn="ctr"/>
+          </a:p>
+        </p:txBody>
+      </p:sp>
+      <p:sp>
+        <p:nvSpPr>
+          <p:cNvPr id="8" name="TextBox 7"/>
           <p:cNvSpPr txBox="1"/>
           <p:nvPr/>
         </p:nvSpPr>
         <p:spPr>
           <a:xfrm>
-            <a:off x="822960" y="1920240"/>
+            <a:off x="822960" y="1965960"/>
             <a:ext cx="4983480" cy="4206240"/>
           </a:xfrm>
           <a:prstGeom prst="rect">
@@ -7685,17 +8664,17 @@
           <a:p>
             <a:pPr>
               <a:spcAft>
-                <a:spcPts val="1000"/>
+                <a:spcPts val="1100"/>
               </a:spcAft>
             </a:pPr>
             <a:r>
               <a:rPr sz="1600" b="1" i="0">
                 <a:solidFill>
-                  <a:srgbClr val="2E3A80"/>
-                </a:solidFill>
-                <a:latin typeface="Montserrat"/>
-              </a:rPr>
-              <a:t>•  </a:t>
+                  <a:srgbClr val="E8801A"/>
+                </a:solidFill>
+                <a:latin typeface="Montserrat"/>
+              </a:rPr>
+              <a:t>▸  </a:t>
             </a:r>
             <a:r>
               <a:rPr sz="1600" b="0" i="0">
@@ -7704,23 +8683,23 @@
                 </a:solidFill>
                 <a:latin typeface="Montserrat"/>
               </a:rPr>
-              <a:t>Instalar y conectar el aparato</a:t>
+              <a:t>Diseñar, montar, probar y revisar</a:t>
             </a:r>
           </a:p>
           <a:p>
             <a:pPr>
               <a:spcAft>
-                <a:spcPts val="1000"/>
+                <a:spcPts val="1100"/>
               </a:spcAft>
             </a:pPr>
             <a:r>
               <a:rPr sz="1600" b="1" i="0">
                 <a:solidFill>
-                  <a:srgbClr val="2E3A80"/>
-                </a:solidFill>
-                <a:latin typeface="Montserrat"/>
-              </a:rPr>
-              <a:t>•  </a:t>
+                  <a:srgbClr val="E8801A"/>
+                </a:solidFill>
+                <a:latin typeface="Montserrat"/>
+              </a:rPr>
+              <a:t>▸  </a:t>
             </a:r>
             <a:r>
               <a:rPr sz="1600" b="0" i="0">
@@ -7729,23 +8708,23 @@
                 </a:solidFill>
                 <a:latin typeface="Montserrat"/>
               </a:rPr>
-              <a:t>De la llave de aparato hacia el aparato</a:t>
+              <a:t>Instalaciones receptoras MOP ≤ 5 bar</a:t>
             </a:r>
           </a:p>
           <a:p>
             <a:pPr>
               <a:spcAft>
-                <a:spcPts val="1000"/>
+                <a:spcPts val="1100"/>
               </a:spcAft>
             </a:pPr>
             <a:r>
               <a:rPr sz="1600" b="1" i="0">
                 <a:solidFill>
-                  <a:srgbClr val="2E3A80"/>
-                </a:solidFill>
-                <a:latin typeface="Montserrat"/>
-              </a:rPr>
-              <a:t>•  </a:t>
+                  <a:srgbClr val="E8801A"/>
+                </a:solidFill>
+                <a:latin typeface="Montserrat"/>
+              </a:rPr>
+              <a:t>▸  </a:t>
             </a:r>
             <a:r>
               <a:rPr sz="1600" b="0" i="0">
@@ -7754,14 +8733,14 @@
                 </a:solidFill>
                 <a:latin typeface="Montserrat"/>
               </a:rPr>
-              <a:t>El punto donde el gas se enchufa</a:t>
-            </a:r>
-          </a:p>
-        </p:txBody>
-      </p:sp>
-      <p:sp>
-        <p:nvSpPr>
-          <p:cNvPr id="8" name="imgph" descr="IMGQ:gas appliance connection valve pipe"/>
+              <a:t>Parte 7: instalar y conectar aparatos</a:t>
+            </a:r>
+          </a:p>
+        </p:txBody>
+      </p:sp>
+      <p:sp>
+        <p:nvSpPr>
+          <p:cNvPr id="9" name="imgph" descr="IMGQ:gas boiler installation on kitchen wall"/>
           <p:cNvSpPr/>
           <p:nvPr/>
         </p:nvSpPr>
@@ -7807,7 +8786,7 @@
       </p:sp>
       <p:sp>
         <p:nvSpPr>
-          <p:cNvPr id="9" name="TextBox 8"/>
+          <p:cNvPr id="10" name="TextBox 9"/>
           <p:cNvSpPr txBox="1"/>
           <p:nvPr/>
         </p:nvSpPr>
@@ -7847,7 +8826,7 @@
                 </a:solidFill>
                 <a:latin typeface="Montserrat"/>
               </a:rPr>
-              <a:t>gas appliance connection valve pipe</a:t>
+              <a:t>gas boiler installation on kitchen wall</a:t>
             </a:r>
           </a:p>
         </p:txBody>
@@ -7944,7 +8923,7 @@
                 </a:solidFill>
                 <a:latin typeface="Montserrat"/>
               </a:rPr>
-              <a:t>005 / 014</a:t>
+              <a:t>005 / 015</a:t>
             </a:r>
           </a:p>
         </p:txBody>
@@ -7992,7 +8971,7 @@
         <p:spPr>
           <a:xfrm>
             <a:off x="822960" y="457200"/>
-            <a:ext cx="8229600" cy="365760"/>
+            <a:ext cx="10058400" cy="365760"/>
           </a:xfrm>
           <a:prstGeom prst="rect">
             <a:avLst/>
@@ -8006,13 +8985,13 @@
           <a:lstStyle/>
           <a:p>
             <a:r>
-              <a:rPr sz="1200" b="1" i="0">
-                <a:solidFill>
-                  <a:srgbClr val="64748B"/>
-                </a:solidFill>
-                <a:latin typeface="Montserrat"/>
-              </a:rPr>
-              <a:t>CAMPO DE APLICACIÓN</a:t>
+              <a:rPr sz="1300" b="1" i="0">
+                <a:solidFill>
+                  <a:srgbClr val="E8801A"/>
+                </a:solidFill>
+                <a:latin typeface="Montserrat"/>
+              </a:rPr>
+              <a:t>PARTE 7 · OBJETO</a:t>
             </a:r>
           </a:p>
         </p:txBody>
@@ -8040,26 +9019,70 @@
           <a:lstStyle/>
           <a:p>
             <a:r>
-              <a:rPr sz="2700" b="1" i="0">
+              <a:rPr sz="2800" b="1" i="0">
                 <a:solidFill>
                   <a:srgbClr val="1E2761"/>
                 </a:solidFill>
                 <a:latin typeface="Montserrat"/>
               </a:rPr>
-              <a:t>Dos orígenes del gas</a:t>
-            </a:r>
-          </a:p>
-        </p:txBody>
-      </p:sp>
-      <p:sp>
-        <p:nvSpPr>
-          <p:cNvPr id="7" name="TextBox 6"/>
+              <a:t>El último metro del gas</a:t>
+            </a:r>
+          </a:p>
+        </p:txBody>
+      </p:sp>
+      <p:sp>
+        <p:nvSpPr>
+          <p:cNvPr id="7" name="Rounded Rectangle 6"/>
+          <p:cNvSpPr/>
+          <p:nvPr/>
+        </p:nvSpPr>
+        <p:spPr>
+          <a:xfrm>
+            <a:off x="868680" y="1627632"/>
+            <a:ext cx="2011680" cy="73152"/>
+          </a:xfrm>
+          <a:prstGeom prst="roundRect">
+            <a:avLst/>
+          </a:prstGeom>
+          <a:solidFill>
+            <a:srgbClr val="E8801A"/>
+          </a:solidFill>
+          <a:ln>
+            <a:noFill/>
+          </a:ln>
+          <a:effectLst/>
+        </p:spPr>
+        <p:style>
+          <a:lnRef idx="1">
+            <a:schemeClr val="accent1"/>
+          </a:lnRef>
+          <a:fillRef idx="3">
+            <a:schemeClr val="accent1"/>
+          </a:fillRef>
+          <a:effectRef idx="2">
+            <a:schemeClr val="accent1"/>
+          </a:effectRef>
+          <a:fontRef idx="minor">
+            <a:schemeClr val="lt1"/>
+          </a:fontRef>
+        </p:style>
+        <p:txBody>
+          <a:bodyPr rtlCol="0" anchor="ctr"/>
+          <a:lstStyle/>
+          <a:p>
+            <a:pPr algn="ctr"/>
+          </a:p>
+        </p:txBody>
+      </p:sp>
+      <p:sp>
+        <p:nvSpPr>
+          <p:cNvPr id="8" name="TextBox 7"/>
           <p:cNvSpPr txBox="1"/>
           <p:nvPr/>
         </p:nvSpPr>
         <p:spPr>
           <a:xfrm>
-            <a:off x="822960" y="1920240"/>
+            <a:off x="822960" y="1965960"/>
             <a:ext cx="4983480" cy="4206240"/>
           </a:xfrm>
           <a:prstGeom prst="rect">
@@ -8075,17 +9098,17 @@
           <a:p>
             <a:pPr>
               <a:spcAft>
-                <a:spcPts val="1000"/>
+                <a:spcPts val="1100"/>
               </a:spcAft>
             </a:pPr>
             <a:r>
               <a:rPr sz="1600" b="1" i="0">
                 <a:solidFill>
-                  <a:srgbClr val="2E3A80"/>
-                </a:solidFill>
-                <a:latin typeface="Montserrat"/>
-              </a:rPr>
-              <a:t>•  </a:t>
+                  <a:srgbClr val="E8801A"/>
+                </a:solidFill>
+                <a:latin typeface="Montserrat"/>
+              </a:rPr>
+              <a:t>▸  </a:t>
             </a:r>
             <a:r>
               <a:rPr sz="1600" b="0" i="0">
@@ -8094,23 +9117,23 @@
                 </a:solidFill>
                 <a:latin typeface="Montserrat"/>
               </a:rPr>
-              <a:t>Instalación receptora (gas de ciudad)</a:t>
+              <a:t>Instalar y conectar el aparato</a:t>
             </a:r>
           </a:p>
           <a:p>
             <a:pPr>
               <a:spcAft>
-                <a:spcPts val="1000"/>
+                <a:spcPts val="1100"/>
               </a:spcAft>
             </a:pPr>
             <a:r>
               <a:rPr sz="1600" b="1" i="0">
                 <a:solidFill>
-                  <a:srgbClr val="2E3A80"/>
-                </a:solidFill>
-                <a:latin typeface="Montserrat"/>
-              </a:rPr>
-              <a:t>•  </a:t>
+                  <a:srgbClr val="E8801A"/>
+                </a:solidFill>
+                <a:latin typeface="Montserrat"/>
+              </a:rPr>
+              <a:t>▸  </a:t>
             </a:r>
             <a:r>
               <a:rPr sz="1600" b="0" i="0">
@@ -8119,23 +9142,23 @@
                 </a:solidFill>
                 <a:latin typeface="Montserrat"/>
               </a:rPr>
-              <a:t>Envase de GLP ≤ 15 kg (bombona)</a:t>
+              <a:t>De la llave de aparato hacia el aparato</a:t>
             </a:r>
           </a:p>
           <a:p>
             <a:pPr>
               <a:spcAft>
-                <a:spcPts val="1000"/>
+                <a:spcPts val="1100"/>
               </a:spcAft>
             </a:pPr>
             <a:r>
               <a:rPr sz="1600" b="1" i="0">
                 <a:solidFill>
-                  <a:srgbClr val="2E3A80"/>
-                </a:solidFill>
-                <a:latin typeface="Montserrat"/>
-              </a:rPr>
-              <a:t>•  </a:t>
+                  <a:srgbClr val="E8801A"/>
+                </a:solidFill>
+                <a:latin typeface="Montserrat"/>
+              </a:rPr>
+              <a:t>▸  </a:t>
             </a:r>
             <a:r>
               <a:rPr sz="1600" b="0" i="0">
@@ -8144,14 +9167,14 @@
                 </a:solidFill>
                 <a:latin typeface="Montserrat"/>
               </a:rPr>
-              <a:t>Mismas reglas para ambos</a:t>
-            </a:r>
-          </a:p>
-        </p:txBody>
-      </p:sp>
-      <p:sp>
-        <p:nvSpPr>
-          <p:cNvPr id="8" name="imgph" descr="IMGQ:butane gas cylinder in kitchen"/>
+              <a:t>El punto donde el gas se enchufa</a:t>
+            </a:r>
+          </a:p>
+        </p:txBody>
+      </p:sp>
+      <p:sp>
+        <p:nvSpPr>
+          <p:cNvPr id="9" name="imgph" descr="IMGQ:gas appliance connection valve pipe"/>
           <p:cNvSpPr/>
           <p:nvPr/>
         </p:nvSpPr>
@@ -8197,7 +9220,7 @@
       </p:sp>
       <p:sp>
         <p:nvSpPr>
-          <p:cNvPr id="9" name="TextBox 8"/>
+          <p:cNvPr id="10" name="TextBox 9"/>
           <p:cNvSpPr txBox="1"/>
           <p:nvPr/>
         </p:nvSpPr>
@@ -8237,7 +9260,7 @@
                 </a:solidFill>
                 <a:latin typeface="Montserrat"/>
               </a:rPr>
-              <a:t>butane gas cylinder in kitchen</a:t>
+              <a:t>gas appliance connection valve pipe</a:t>
             </a:r>
           </a:p>
         </p:txBody>
@@ -8334,7 +9357,7 @@
                 </a:solidFill>
                 <a:latin typeface="Montserrat"/>
               </a:rPr>
-              <a:t>006 / 014</a:t>
+              <a:t>006 / 015</a:t>
             </a:r>
           </a:p>
         </p:txBody>
@@ -8382,7 +9405,7 @@
         <p:spPr>
           <a:xfrm>
             <a:off x="822960" y="457200"/>
-            <a:ext cx="8229600" cy="365760"/>
+            <a:ext cx="10058400" cy="365760"/>
           </a:xfrm>
           <a:prstGeom prst="rect">
             <a:avLst/>
@@ -8396,13 +9419,13 @@
           <a:lstStyle/>
           <a:p>
             <a:r>
-              <a:rPr sz="1200" b="1" i="0">
-                <a:solidFill>
-                  <a:srgbClr val="64748B"/>
-                </a:solidFill>
-                <a:latin typeface="Montserrat"/>
-              </a:rPr>
-              <a:t>UBICACIÓN DE APARATOS</a:t>
+              <a:rPr sz="1300" b="1" i="0">
+                <a:solidFill>
+                  <a:srgbClr val="E8801A"/>
+                </a:solidFill>
+                <a:latin typeface="Montserrat"/>
+              </a:rPr>
+              <a:t>CAMPO DE APLICACIÓN</a:t>
             </a:r>
           </a:p>
         </p:txBody>
@@ -8430,26 +9453,70 @@
           <a:lstStyle/>
           <a:p>
             <a:r>
-              <a:rPr sz="2700" b="1" i="0">
+              <a:rPr sz="2800" b="1" i="0">
                 <a:solidFill>
                   <a:srgbClr val="1E2761"/>
                 </a:solidFill>
                 <a:latin typeface="Montserrat"/>
               </a:rPr>
-              <a:t>Tipo B y C: siempre fijos</a:t>
-            </a:r>
-          </a:p>
-        </p:txBody>
-      </p:sp>
-      <p:sp>
-        <p:nvSpPr>
-          <p:cNvPr id="7" name="TextBox 6"/>
+              <a:t>Dos orígenes del gas</a:t>
+            </a:r>
+          </a:p>
+        </p:txBody>
+      </p:sp>
+      <p:sp>
+        <p:nvSpPr>
+          <p:cNvPr id="7" name="Rounded Rectangle 6"/>
+          <p:cNvSpPr/>
+          <p:nvPr/>
+        </p:nvSpPr>
+        <p:spPr>
+          <a:xfrm>
+            <a:off x="868680" y="1627632"/>
+            <a:ext cx="2011680" cy="73152"/>
+          </a:xfrm>
+          <a:prstGeom prst="roundRect">
+            <a:avLst/>
+          </a:prstGeom>
+          <a:solidFill>
+            <a:srgbClr val="E8801A"/>
+          </a:solidFill>
+          <a:ln>
+            <a:noFill/>
+          </a:ln>
+          <a:effectLst/>
+        </p:spPr>
+        <p:style>
+          <a:lnRef idx="1">
+            <a:schemeClr val="accent1"/>
+          </a:lnRef>
+          <a:fillRef idx="3">
+            <a:schemeClr val="accent1"/>
+          </a:fillRef>
+          <a:effectRef idx="2">
+            <a:schemeClr val="accent1"/>
+          </a:effectRef>
+          <a:fontRef idx="minor">
+            <a:schemeClr val="lt1"/>
+          </a:fontRef>
+        </p:style>
+        <p:txBody>
+          <a:bodyPr rtlCol="0" anchor="ctr"/>
+          <a:lstStyle/>
+          <a:p>
+            <a:pPr algn="ctr"/>
+          </a:p>
+        </p:txBody>
+      </p:sp>
+      <p:sp>
+        <p:nvSpPr>
+          <p:cNvPr id="8" name="TextBox 7"/>
           <p:cNvSpPr txBox="1"/>
           <p:nvPr/>
         </p:nvSpPr>
         <p:spPr>
           <a:xfrm>
-            <a:off x="822960" y="1920240"/>
+            <a:off x="822960" y="1965960"/>
             <a:ext cx="4983480" cy="4206240"/>
           </a:xfrm>
           <a:prstGeom prst="rect">
@@ -8465,17 +9532,17 @@
           <a:p>
             <a:pPr>
               <a:spcAft>
-                <a:spcPts val="1000"/>
+                <a:spcPts val="1100"/>
               </a:spcAft>
             </a:pPr>
             <a:r>
               <a:rPr sz="1600" b="1" i="0">
                 <a:solidFill>
-                  <a:srgbClr val="2E3A80"/>
-                </a:solidFill>
-                <a:latin typeface="Montserrat"/>
-              </a:rPr>
-              <a:t>•  </a:t>
+                  <a:srgbClr val="E8801A"/>
+                </a:solidFill>
+                <a:latin typeface="Montserrat"/>
+              </a:rPr>
+              <a:t>▸  </a:t>
             </a:r>
             <a:r>
               <a:rPr sz="1600" b="0" i="0">
@@ -8484,23 +9551,23 @@
                 </a:solidFill>
                 <a:latin typeface="Montserrat"/>
               </a:rPr>
-              <a:t>Tipo B y tipo C: instalación fija</a:t>
+              <a:t>Instalación receptora (gas de ciudad)</a:t>
             </a:r>
           </a:p>
           <a:p>
             <a:pPr>
               <a:spcAft>
-                <a:spcPts val="1000"/>
+                <a:spcPts val="1100"/>
               </a:spcAft>
             </a:pPr>
             <a:r>
               <a:rPr sz="1600" b="1" i="0">
                 <a:solidFill>
-                  <a:srgbClr val="2E3A80"/>
-                </a:solidFill>
-                <a:latin typeface="Montserrat"/>
-              </a:rPr>
-              <a:t>•  </a:t>
+                  <a:srgbClr val="E8801A"/>
+                </a:solidFill>
+                <a:latin typeface="Montserrat"/>
+              </a:rPr>
+              <a:t>▸  </a:t>
             </a:r>
             <a:r>
               <a:rPr sz="1600" b="0" i="0">
@@ -8509,23 +9576,23 @@
                 </a:solidFill>
                 <a:latin typeface="Montserrat"/>
               </a:rPr>
-              <a:t>Son los que llevan conducto de humos</a:t>
+              <a:t>Envase de GLP ≤ 15 kg (bombona)</a:t>
             </a:r>
           </a:p>
           <a:p>
             <a:pPr>
               <a:spcAft>
-                <a:spcPts val="1000"/>
+                <a:spcPts val="1100"/>
               </a:spcAft>
             </a:pPr>
             <a:r>
               <a:rPr sz="1600" b="1" i="0">
                 <a:solidFill>
-                  <a:srgbClr val="2E3A80"/>
-                </a:solidFill>
-                <a:latin typeface="Montserrat"/>
-              </a:rPr>
-              <a:t>•  </a:t>
+                  <a:srgbClr val="E8801A"/>
+                </a:solidFill>
+                <a:latin typeface="Montserrat"/>
+              </a:rPr>
+              <a:t>▸  </a:t>
             </a:r>
             <a:r>
               <a:rPr sz="1600" b="0" i="0">
@@ -8534,14 +9601,14 @@
                 </a:solidFill>
                 <a:latin typeface="Montserrat"/>
               </a:rPr>
-              <a:t>Lo móvil es cosa del tipo A</a:t>
-            </a:r>
-          </a:p>
-        </p:txBody>
-      </p:sp>
-      <p:sp>
-        <p:nvSpPr>
-          <p:cNvPr id="8" name="imgph" descr="IMGQ:wall mounted gas boiler fixed"/>
+              <a:t>Mismas reglas para ambos</a:t>
+            </a:r>
+          </a:p>
+        </p:txBody>
+      </p:sp>
+      <p:sp>
+        <p:nvSpPr>
+          <p:cNvPr id="9" name="imgph" descr="IMGQ:butane gas cylinder in kitchen"/>
           <p:cNvSpPr/>
           <p:nvPr/>
         </p:nvSpPr>
@@ -8587,7 +9654,7 @@
       </p:sp>
       <p:sp>
         <p:nvSpPr>
-          <p:cNvPr id="9" name="TextBox 8"/>
+          <p:cNvPr id="10" name="TextBox 9"/>
           <p:cNvSpPr txBox="1"/>
           <p:nvPr/>
         </p:nvSpPr>
@@ -8627,7 +9694,7 @@
                 </a:solidFill>
                 <a:latin typeface="Montserrat"/>
               </a:rPr>
-              <a:t>wall mounted gas boiler fixed</a:t>
+              <a:t>butane gas cylinder in kitchen</a:t>
             </a:r>
           </a:p>
         </p:txBody>
@@ -8724,7 +9791,7 @@
                 </a:solidFill>
                 <a:latin typeface="Montserrat"/>
               </a:rPr>
-              <a:t>007 / 014</a:t>
+              <a:t>007 / 015</a:t>
             </a:r>
           </a:p>
         </p:txBody>
@@ -8772,7 +9839,7 @@
         <p:spPr>
           <a:xfrm>
             <a:off x="822960" y="457200"/>
-            <a:ext cx="8229600" cy="365760"/>
+            <a:ext cx="10058400" cy="365760"/>
           </a:xfrm>
           <a:prstGeom prst="rect">
             <a:avLst/>
@@ -8786,13 +9853,13 @@
           <a:lstStyle/>
           <a:p>
             <a:r>
-              <a:rPr sz="1200" b="1" i="0">
-                <a:solidFill>
-                  <a:srgbClr val="64748B"/>
-                </a:solidFill>
-                <a:latin typeface="Montserrat"/>
-              </a:rPr>
-              <a:t>DISTANCIA AL CALOR</a:t>
+              <a:rPr sz="1300" b="1" i="0">
+                <a:solidFill>
+                  <a:srgbClr val="E8801A"/>
+                </a:solidFill>
+                <a:latin typeface="Montserrat"/>
+              </a:rPr>
+              <a:t>UBICACIÓN DE APARATOS</a:t>
             </a:r>
           </a:p>
         </p:txBody>
@@ -8820,26 +9887,70 @@
           <a:lstStyle/>
           <a:p>
             <a:r>
-              <a:rPr sz="2700" b="1" i="0">
+              <a:rPr sz="2800" b="1" i="0">
                 <a:solidFill>
                   <a:srgbClr val="1E2761"/>
                 </a:solidFill>
                 <a:latin typeface="Montserrat"/>
               </a:rPr>
-              <a:t>40 cm sobre la cocina</a:t>
-            </a:r>
-          </a:p>
-        </p:txBody>
-      </p:sp>
-      <p:sp>
-        <p:nvSpPr>
-          <p:cNvPr id="7" name="TextBox 6"/>
+              <a:t>Tipo B y C: siempre fijos</a:t>
+            </a:r>
+          </a:p>
+        </p:txBody>
+      </p:sp>
+      <p:sp>
+        <p:nvSpPr>
+          <p:cNvPr id="7" name="Rounded Rectangle 6"/>
+          <p:cNvSpPr/>
+          <p:nvPr/>
+        </p:nvSpPr>
+        <p:spPr>
+          <a:xfrm>
+            <a:off x="868680" y="1627632"/>
+            <a:ext cx="2011680" cy="73152"/>
+          </a:xfrm>
+          <a:prstGeom prst="roundRect">
+            <a:avLst/>
+          </a:prstGeom>
+          <a:solidFill>
+            <a:srgbClr val="E8801A"/>
+          </a:solidFill>
+          <a:ln>
+            <a:noFill/>
+          </a:ln>
+          <a:effectLst/>
+        </p:spPr>
+        <p:style>
+          <a:lnRef idx="1">
+            <a:schemeClr val="accent1"/>
+          </a:lnRef>
+          <a:fillRef idx="3">
+            <a:schemeClr val="accent1"/>
+          </a:fillRef>
+          <a:effectRef idx="2">
+            <a:schemeClr val="accent1"/>
+          </a:effectRef>
+          <a:fontRef idx="minor">
+            <a:schemeClr val="lt1"/>
+          </a:fontRef>
+        </p:style>
+        <p:txBody>
+          <a:bodyPr rtlCol="0" anchor="ctr"/>
+          <a:lstStyle/>
+          <a:p>
+            <a:pPr algn="ctr"/>
+          </a:p>
+        </p:txBody>
+      </p:sp>
+      <p:sp>
+        <p:nvSpPr>
+          <p:cNvPr id="8" name="TextBox 7"/>
           <p:cNvSpPr txBox="1"/>
           <p:nvPr/>
         </p:nvSpPr>
         <p:spPr>
           <a:xfrm>
-            <a:off x="822960" y="1920240"/>
+            <a:off x="822960" y="1965960"/>
             <a:ext cx="4983480" cy="4206240"/>
           </a:xfrm>
           <a:prstGeom prst="rect">
@@ -8855,17 +9966,17 @@
           <a:p>
             <a:pPr>
               <a:spcAft>
-                <a:spcPts val="1000"/>
+                <a:spcPts val="1100"/>
               </a:spcAft>
             </a:pPr>
             <a:r>
               <a:rPr sz="1600" b="1" i="0">
                 <a:solidFill>
-                  <a:srgbClr val="2E3A80"/>
-                </a:solidFill>
-                <a:latin typeface="Montserrat"/>
-              </a:rPr>
-              <a:t>•  </a:t>
+                  <a:srgbClr val="E8801A"/>
+                </a:solidFill>
+                <a:latin typeface="Montserrat"/>
+              </a:rPr>
+              <a:t>▸  </a:t>
             </a:r>
             <a:r>
               <a:rPr sz="1600" b="0" i="0">
@@ -8874,23 +9985,23 @@
                 </a:solidFill>
                 <a:latin typeface="Montserrat"/>
               </a:rPr>
-              <a:t>Circuito abierto encima de cocción</a:t>
+              <a:t>Tipo B y tipo C: instalación fija</a:t>
             </a:r>
           </a:p>
           <a:p>
             <a:pPr>
               <a:spcAft>
-                <a:spcPts val="1000"/>
+                <a:spcPts val="1100"/>
               </a:spcAft>
             </a:pPr>
             <a:r>
               <a:rPr sz="1600" b="1" i="0">
                 <a:solidFill>
-                  <a:srgbClr val="2E3A80"/>
-                </a:solidFill>
-                <a:latin typeface="Montserrat"/>
-              </a:rPr>
-              <a:t>•  </a:t>
+                  <a:srgbClr val="E8801A"/>
+                </a:solidFill>
+                <a:latin typeface="Montserrat"/>
+              </a:rPr>
+              <a:t>▸  </a:t>
             </a:r>
             <a:r>
               <a:rPr sz="1600" b="0" i="0">
@@ -8899,23 +10010,23 @@
                 </a:solidFill>
                 <a:latin typeface="Montserrat"/>
               </a:rPr>
-              <a:t>40 cm horizontales al quemador</a:t>
+              <a:t>Son los que llevan conducto de humos</a:t>
             </a:r>
           </a:p>
           <a:p>
             <a:pPr>
               <a:spcAft>
-                <a:spcPts val="1000"/>
+                <a:spcPts val="1100"/>
               </a:spcAft>
             </a:pPr>
             <a:r>
               <a:rPr sz="1600" b="1" i="0">
                 <a:solidFill>
-                  <a:srgbClr val="2E3A80"/>
-                </a:solidFill>
-                <a:latin typeface="Montserrat"/>
-              </a:rPr>
-              <a:t>•  </a:t>
+                  <a:srgbClr val="E8801A"/>
+                </a:solidFill>
+                <a:latin typeface="Montserrat"/>
+              </a:rPr>
+              <a:t>▸  </a:t>
             </a:r>
             <a:r>
               <a:rPr sz="1600" b="0" i="0">
@@ -8924,14 +10035,14 @@
                 </a:solidFill>
                 <a:latin typeface="Montserrat"/>
               </a:rPr>
-              <a:t>Con pantalla de protección, hasta 10 cm</a:t>
-            </a:r>
-          </a:p>
-        </p:txBody>
-      </p:sp>
-      <p:sp>
-        <p:nvSpPr>
-          <p:cNvPr id="8" name="imgph" descr="IMGQ:gas water heater above kitchen stove"/>
+              <a:t>Lo móvil es cosa del tipo A</a:t>
+            </a:r>
+          </a:p>
+        </p:txBody>
+      </p:sp>
+      <p:sp>
+        <p:nvSpPr>
+          <p:cNvPr id="9" name="imgph" descr="IMGQ:wall mounted gas boiler fixed"/>
           <p:cNvSpPr/>
           <p:nvPr/>
         </p:nvSpPr>
@@ -8977,7 +10088,7 @@
       </p:sp>
       <p:sp>
         <p:nvSpPr>
-          <p:cNvPr id="9" name="TextBox 8"/>
+          <p:cNvPr id="10" name="TextBox 9"/>
           <p:cNvSpPr txBox="1"/>
           <p:nvPr/>
         </p:nvSpPr>
@@ -9017,7 +10128,7 @@
                 </a:solidFill>
                 <a:latin typeface="Montserrat"/>
               </a:rPr>
-              <a:t>gas water heater above kitchen stove</a:t>
+              <a:t>wall mounted gas boiler fixed</a:t>
             </a:r>
           </a:p>
         </p:txBody>
@@ -9114,7 +10225,7 @@
                 </a:solidFill>
                 <a:latin typeface="Montserrat"/>
               </a:rPr>
-              <a:t>008 / 014</a:t>
+              <a:t>008 / 015</a:t>
             </a:r>
           </a:p>
         </p:txBody>
@@ -9162,7 +10273,7 @@
         <p:spPr>
           <a:xfrm>
             <a:off x="822960" y="457200"/>
-            <a:ext cx="8229600" cy="365760"/>
+            <a:ext cx="10058400" cy="365760"/>
           </a:xfrm>
           <a:prstGeom prst="rect">
             <a:avLst/>
@@ -9176,9 +10287,9 @@
           <a:lstStyle/>
           <a:p>
             <a:r>
-              <a:rPr sz="1200" b="1" i="0">
-                <a:solidFill>
-                  <a:srgbClr val="64748B"/>
+              <a:rPr sz="1300" b="1" i="0">
+                <a:solidFill>
+                  <a:srgbClr val="E8801A"/>
                 </a:solidFill>
                 <a:latin typeface="Montserrat"/>
               </a:rPr>
@@ -9210,26 +10321,70 @@
           <a:lstStyle/>
           <a:p>
             <a:r>
-              <a:rPr sz="2700" b="1" i="0">
+              <a:rPr sz="2800" b="1" i="0">
                 <a:solidFill>
                   <a:srgbClr val="1E2761"/>
                 </a:solidFill>
                 <a:latin typeface="Montserrat"/>
               </a:rPr>
-              <a:t>El tipo C, 10 cm fijos</a:t>
-            </a:r>
-          </a:p>
-        </p:txBody>
-      </p:sp>
-      <p:sp>
-        <p:nvSpPr>
-          <p:cNvPr id="7" name="TextBox 6"/>
+              <a:t>40 cm sobre la cocina</a:t>
+            </a:r>
+          </a:p>
+        </p:txBody>
+      </p:sp>
+      <p:sp>
+        <p:nvSpPr>
+          <p:cNvPr id="7" name="Rounded Rectangle 6"/>
+          <p:cNvSpPr/>
+          <p:nvPr/>
+        </p:nvSpPr>
+        <p:spPr>
+          <a:xfrm>
+            <a:off x="868680" y="1627632"/>
+            <a:ext cx="2011680" cy="73152"/>
+          </a:xfrm>
+          <a:prstGeom prst="roundRect">
+            <a:avLst/>
+          </a:prstGeom>
+          <a:solidFill>
+            <a:srgbClr val="E8801A"/>
+          </a:solidFill>
+          <a:ln>
+            <a:noFill/>
+          </a:ln>
+          <a:effectLst/>
+        </p:spPr>
+        <p:style>
+          <a:lnRef idx="1">
+            <a:schemeClr val="accent1"/>
+          </a:lnRef>
+          <a:fillRef idx="3">
+            <a:schemeClr val="accent1"/>
+          </a:fillRef>
+          <a:effectRef idx="2">
+            <a:schemeClr val="accent1"/>
+          </a:effectRef>
+          <a:fontRef idx="minor">
+            <a:schemeClr val="lt1"/>
+          </a:fontRef>
+        </p:style>
+        <p:txBody>
+          <a:bodyPr rtlCol="0" anchor="ctr"/>
+          <a:lstStyle/>
+          <a:p>
+            <a:pPr algn="ctr"/>
+          </a:p>
+        </p:txBody>
+      </p:sp>
+      <p:sp>
+        <p:nvSpPr>
+          <p:cNvPr id="8" name="TextBox 7"/>
           <p:cNvSpPr txBox="1"/>
           <p:nvPr/>
         </p:nvSpPr>
         <p:spPr>
           <a:xfrm>
-            <a:off x="822960" y="1920240"/>
+            <a:off x="822960" y="1965960"/>
             <a:ext cx="4983480" cy="4206240"/>
           </a:xfrm>
           <a:prstGeom prst="rect">
@@ -9245,17 +10400,17 @@
           <a:p>
             <a:pPr>
               <a:spcAft>
-                <a:spcPts val="1000"/>
+                <a:spcPts val="1100"/>
               </a:spcAft>
             </a:pPr>
             <a:r>
               <a:rPr sz="1600" b="1" i="0">
                 <a:solidFill>
-                  <a:srgbClr val="2E3A80"/>
-                </a:solidFill>
-                <a:latin typeface="Montserrat"/>
-              </a:rPr>
-              <a:t>•  </a:t>
+                  <a:srgbClr val="E8801A"/>
+                </a:solidFill>
+                <a:latin typeface="Montserrat"/>
+              </a:rPr>
+              <a:t>▸  </a:t>
             </a:r>
             <a:r>
               <a:rPr sz="1600" b="0" i="0">
@@ -9264,23 +10419,23 @@
                 </a:solidFill>
                 <a:latin typeface="Montserrat"/>
               </a:rPr>
-              <a:t>El tipo C es estanco</a:t>
+              <a:t>Circuito abierto encima de cocción</a:t>
             </a:r>
           </a:p>
           <a:p>
             <a:pPr>
               <a:spcAft>
-                <a:spcPts val="1000"/>
+                <a:spcPts val="1100"/>
               </a:spcAft>
             </a:pPr>
             <a:r>
               <a:rPr sz="1600" b="1" i="0">
                 <a:solidFill>
-                  <a:srgbClr val="2E3A80"/>
-                </a:solidFill>
-                <a:latin typeface="Montserrat"/>
-              </a:rPr>
-              <a:t>•  </a:t>
+                  <a:srgbClr val="E8801A"/>
+                </a:solidFill>
+                <a:latin typeface="Montserrat"/>
+              </a:rPr>
+              <a:t>▸  </a:t>
             </a:r>
             <a:r>
               <a:rPr sz="1600" b="0" i="0">
@@ -9289,23 +10444,23 @@
                 </a:solidFill>
                 <a:latin typeface="Montserrat"/>
               </a:rPr>
-              <a:t>Coge aire y saca humos por su conducto</a:t>
+              <a:t>40 cm horizontales al quemador</a:t>
             </a:r>
           </a:p>
           <a:p>
             <a:pPr>
               <a:spcAft>
-                <a:spcPts val="1000"/>
+                <a:spcPts val="1100"/>
               </a:spcAft>
             </a:pPr>
             <a:r>
               <a:rPr sz="1600" b="1" i="0">
                 <a:solidFill>
-                  <a:srgbClr val="2E3A80"/>
-                </a:solidFill>
-                <a:latin typeface="Montserrat"/>
-              </a:rPr>
-              <a:t>•  </a:t>
+                  <a:srgbClr val="E8801A"/>
+                </a:solidFill>
+                <a:latin typeface="Montserrat"/>
+              </a:rPr>
+              <a:t>▸  </a:t>
             </a:r>
             <a:r>
               <a:rPr sz="1600" b="0" i="0">
@@ -9314,14 +10469,14 @@
                 </a:solidFill>
                 <a:latin typeface="Montserrat"/>
               </a:rPr>
-              <a:t>10 cm, lleve pantalla o no</a:t>
-            </a:r>
-          </a:p>
-        </p:txBody>
-      </p:sp>
-      <p:sp>
-        <p:nvSpPr>
-          <p:cNvPr id="8" name="imgph" descr="IMGQ:sealed gas boiler flue pipe"/>
+              <a:t>Con pantalla de protección, hasta 10 cm</a:t>
+            </a:r>
+          </a:p>
+        </p:txBody>
+      </p:sp>
+      <p:sp>
+        <p:nvSpPr>
+          <p:cNvPr id="9" name="imgph" descr="IMGQ:gas water heater above kitchen stove"/>
           <p:cNvSpPr/>
           <p:nvPr/>
         </p:nvSpPr>
@@ -9367,7 +10522,7 @@
       </p:sp>
       <p:sp>
         <p:nvSpPr>
-          <p:cNvPr id="9" name="TextBox 8"/>
+          <p:cNvPr id="10" name="TextBox 9"/>
           <p:cNvSpPr txBox="1"/>
           <p:nvPr/>
         </p:nvSpPr>
@@ -9407,7 +10562,7 @@
                 </a:solidFill>
                 <a:latin typeface="Montserrat"/>
               </a:rPr>
-              <a:t>sealed gas boiler flue pipe</a:t>
+              <a:t>gas water heater above kitchen stove</a:t>
             </a:r>
           </a:p>
         </p:txBody>
@@ -9504,7 +10659,7 @@
                 </a:solidFill>
                 <a:latin typeface="Montserrat"/>
               </a:rPr>
-              <a:t>009 / 014</a:t>
+              <a:t>009 / 015</a:t>
             </a:r>
           </a:p>
         </p:txBody>
@@ -9552,7 +10707,7 @@
         <p:spPr>
           <a:xfrm>
             <a:off x="822960" y="457200"/>
-            <a:ext cx="8229600" cy="365760"/>
+            <a:ext cx="10058400" cy="365760"/>
           </a:xfrm>
           <a:prstGeom prst="rect">
             <a:avLst/>
@@ -9566,13 +10721,13 @@
           <a:lstStyle/>
           <a:p>
             <a:r>
-              <a:rPr sz="1200" b="1" i="0">
-                <a:solidFill>
-                  <a:srgbClr val="64748B"/>
-                </a:solidFill>
-                <a:latin typeface="Montserrat"/>
-              </a:rPr>
-              <a:t>TIPOS DE CONEXIÓN</a:t>
+              <a:rPr sz="1300" b="1" i="0">
+                <a:solidFill>
+                  <a:srgbClr val="E8801A"/>
+                </a:solidFill>
+                <a:latin typeface="Montserrat"/>
+              </a:rPr>
+              <a:t>DISTANCIA AL CALOR</a:t>
             </a:r>
           </a:p>
         </p:txBody>
@@ -9600,26 +10755,70 @@
           <a:lstStyle/>
           <a:p>
             <a:r>
-              <a:rPr sz="2700" b="1" i="0">
+              <a:rPr sz="2800" b="1" i="0">
                 <a:solidFill>
                   <a:srgbClr val="1E2761"/>
                 </a:solidFill>
                 <a:latin typeface="Montserrat"/>
               </a:rPr>
-              <a:t>Todo pasa por la llave</a:t>
-            </a:r>
-          </a:p>
-        </p:txBody>
-      </p:sp>
-      <p:sp>
-        <p:nvSpPr>
-          <p:cNvPr id="7" name="TextBox 6"/>
+              <a:t>El tipo C, 10 cm fijos</a:t>
+            </a:r>
+          </a:p>
+        </p:txBody>
+      </p:sp>
+      <p:sp>
+        <p:nvSpPr>
+          <p:cNvPr id="7" name="Rounded Rectangle 6"/>
+          <p:cNvSpPr/>
+          <p:nvPr/>
+        </p:nvSpPr>
+        <p:spPr>
+          <a:xfrm>
+            <a:off x="868680" y="1627632"/>
+            <a:ext cx="2011680" cy="73152"/>
+          </a:xfrm>
+          <a:prstGeom prst="roundRect">
+            <a:avLst/>
+          </a:prstGeom>
+          <a:solidFill>
+            <a:srgbClr val="E8801A"/>
+          </a:solidFill>
+          <a:ln>
+            <a:noFill/>
+          </a:ln>
+          <a:effectLst/>
+        </p:spPr>
+        <p:style>
+          <a:lnRef idx="1">
+            <a:schemeClr val="accent1"/>
+          </a:lnRef>
+          <a:fillRef idx="3">
+            <a:schemeClr val="accent1"/>
+          </a:fillRef>
+          <a:effectRef idx="2">
+            <a:schemeClr val="accent1"/>
+          </a:effectRef>
+          <a:fontRef idx="minor">
+            <a:schemeClr val="lt1"/>
+          </a:fontRef>
+        </p:style>
+        <p:txBody>
+          <a:bodyPr rtlCol="0" anchor="ctr"/>
+          <a:lstStyle/>
+          <a:p>
+            <a:pPr algn="ctr"/>
+          </a:p>
+        </p:txBody>
+      </p:sp>
+      <p:sp>
+        <p:nvSpPr>
+          <p:cNvPr id="8" name="TextBox 7"/>
           <p:cNvSpPr txBox="1"/>
           <p:nvPr/>
         </p:nvSpPr>
         <p:spPr>
           <a:xfrm>
-            <a:off x="822960" y="1920240"/>
+            <a:off x="822960" y="1965960"/>
             <a:ext cx="4983480" cy="4206240"/>
           </a:xfrm>
           <a:prstGeom prst="rect">
@@ -9635,17 +10834,17 @@
           <a:p>
             <a:pPr>
               <a:spcAft>
-                <a:spcPts val="1000"/>
+                <a:spcPts val="1100"/>
               </a:spcAft>
             </a:pPr>
             <a:r>
               <a:rPr sz="1600" b="1" i="0">
                 <a:solidFill>
-                  <a:srgbClr val="2E3A80"/>
-                </a:solidFill>
-                <a:latin typeface="Montserrat"/>
-              </a:rPr>
-              <a:t>•  </a:t>
+                  <a:srgbClr val="E8801A"/>
+                </a:solidFill>
+                <a:latin typeface="Montserrat"/>
+              </a:rPr>
+              <a:t>▸  </a:t>
             </a:r>
             <a:r>
               <a:rPr sz="1600" b="0" i="0">
@@ -9654,23 +10853,23 @@
                 </a:solidFill>
                 <a:latin typeface="Montserrat"/>
               </a:rPr>
-              <a:t>Conexión tras la llave de aparato</a:t>
+              <a:t>El tipo C es estanco</a:t>
             </a:r>
           </a:p>
           <a:p>
             <a:pPr>
               <a:spcAft>
-                <a:spcPts val="1000"/>
+                <a:spcPts val="1100"/>
               </a:spcAft>
             </a:pPr>
             <a:r>
               <a:rPr sz="1600" b="1" i="0">
                 <a:solidFill>
-                  <a:srgbClr val="2E3A80"/>
-                </a:solidFill>
-                <a:latin typeface="Montserrat"/>
-              </a:rPr>
-              <a:t>•  </a:t>
+                  <a:srgbClr val="E8801A"/>
+                </a:solidFill>
+                <a:latin typeface="Montserrat"/>
+              </a:rPr>
+              <a:t>▸  </a:t>
             </a:r>
             <a:r>
               <a:rPr sz="1600" b="0" i="0">
@@ -9679,23 +10878,23 @@
                 </a:solidFill>
                 <a:latin typeface="Montserrat"/>
               </a:rPr>
-              <a:t>Tabla 1: aparatos de gas</a:t>
+              <a:t>Coge aire y saca humos por su conducto</a:t>
             </a:r>
           </a:p>
           <a:p>
             <a:pPr>
               <a:spcAft>
-                <a:spcPts val="1000"/>
+                <a:spcPts val="1100"/>
               </a:spcAft>
             </a:pPr>
             <a:r>
               <a:rPr sz="1600" b="1" i="0">
                 <a:solidFill>
-                  <a:srgbClr val="2E3A80"/>
-                </a:solidFill>
-                <a:latin typeface="Montserrat"/>
-              </a:rPr>
-              <a:t>•  </a:t>
+                  <a:srgbClr val="E8801A"/>
+                </a:solidFill>
+                <a:latin typeface="Montserrat"/>
+              </a:rPr>
+              <a:t>▸  </a:t>
             </a:r>
             <a:r>
               <a:rPr sz="1600" b="0" i="0">
@@ -9704,39 +10903,14 @@
                 </a:solidFill>
                 <a:latin typeface="Montserrat"/>
               </a:rPr>
-              <a:t>Tabla 2: mecheros y sopletes</a:t>
-            </a:r>
-          </a:p>
-          <a:p>
-            <a:pPr>
-              <a:spcAft>
-                <a:spcPts val="1000"/>
-              </a:spcAft>
-            </a:pPr>
-            <a:r>
-              <a:rPr sz="1600" b="1" i="0">
-                <a:solidFill>
-                  <a:srgbClr val="2E3A80"/>
-                </a:solidFill>
-                <a:latin typeface="Montserrat"/>
-              </a:rPr>
-              <a:t>•  </a:t>
-            </a:r>
-            <a:r>
-              <a:rPr sz="1600" b="0" i="0">
-                <a:solidFill>
-                  <a:srgbClr val="1B2330"/>
-                </a:solidFill>
-                <a:latin typeface="Montserrat"/>
-              </a:rPr>
-              <a:t>Si el aparato vibra, flexible</a:t>
-            </a:r>
-          </a:p>
-        </p:txBody>
-      </p:sp>
-      <p:sp>
-        <p:nvSpPr>
-          <p:cNvPr id="8" name="imgph" descr="IMGQ:flexible gas hose connection appliance"/>
+              <a:t>10 cm, lleve pantalla o no</a:t>
+            </a:r>
+          </a:p>
+        </p:txBody>
+      </p:sp>
+      <p:sp>
+        <p:nvSpPr>
+          <p:cNvPr id="9" name="imgph" descr="IMGQ:sealed gas boiler flue pipe"/>
           <p:cNvSpPr/>
           <p:nvPr/>
         </p:nvSpPr>
@@ -9782,7 +10956,7 @@
       </p:sp>
       <p:sp>
         <p:nvSpPr>
-          <p:cNvPr id="9" name="TextBox 8"/>
+          <p:cNvPr id="10" name="TextBox 9"/>
           <p:cNvSpPr txBox="1"/>
           <p:nvPr/>
         </p:nvSpPr>
@@ -9822,7 +10996,7 @@
                 </a:solidFill>
                 <a:latin typeface="Montserrat"/>
               </a:rPr>
-              <a:t>flexible gas hose connection appliance</a:t>
+              <a:t>sealed gas boiler flue pipe</a:t>
             </a:r>
           </a:p>
         </p:txBody>

--- a/Curso Gas B/14 - UNE 60670 - Instalacion y conexion de aparatos/14 - UNE 60670 - Instalacion y conexion de aparatos - Vídeo 1.pptx
+++ b/Curso Gas B/14 - UNE 60670 - Instalacion y conexion de aparatos/14 - UNE 60670 - Instalacion y conexion de aparatos - Vídeo 1.pptx
@@ -599,12 +599,12 @@
           <a:lstStyle/>
           <a:p>
             <a:r>
-              <a:t>N1: Va pregunta rápida, que esta cae seguro. Calentador de circuito abierto colgado justo encima de los fuegos y sin pantalla, ¿cuánto tiene que separarse del quemador más cercano?</a:t>
-            </a:r>
-          </a:p>
-          <a:p>
-            <a:r>
-              <a:t>N2: Piensa en la columna de calor que sube de la cocina; la norma quiere el calentador lo bastante lejos para que no lo achicharre.</a:t>
+              <a:t>N1: Vamos con una pregunta que cae seguro, y esta puedes jugarla solo de oído. Escucha bien: un calentador de circuito abierto va colgado sobre la cocina y sin pantalla de protección. ¿Cuál es la distancia horizontal mínima al quemador más cercano? Opción A, diez centímetros; opción B, veinticinco centímetros; opción C, cuarenta centímetros; opción D, sesenta centímetros.</a:t>
+            </a:r>
+          </a:p>
+          <a:p>
+            <a:r>
+              <a:t>N2: Tómate un momento y piensa en esa columna de calor que sube de los fuegos: la norma quiere el calentador lo bastante lejos para que no se achicharre. ¿Ya tienes tu respuesta?</a:t>
             </a:r>
           </a:p>
         </p:txBody>
@@ -674,12 +674,12 @@
           <a:lstStyle/>
           <a:p>
             <a:r>
-              <a:t>N1: ¿Por qué esa y no otra?</a:t>
-            </a:r>
-          </a:p>
-          <a:p>
-            <a:r>
-              <a:t>N2: Sin protección manda la cifra grande, cuarenta centímetros en horizontal al quemador más cercano. Si metes una pantalla que corte el calor, puedes bajar hasta diez. Y no lo confundas con el tipo C, que por ser estanco se queda en diez fijos, lleve pantalla o no. El truco: cuarenta sin protección, diez con protección.</a:t>
+              <a:t>N2: La respuesta correcta es la opción C: cuarenta centímetros. Cuando el calentador es de circuito abierto y va sin protección, manda la cifra grande, cuarenta centímetros en horizontal al quemador más cercano. Si metes una pantalla que corte el calor, puedes bajar hasta diez. El truco para no fallar: cuarenta sin protección, diez con protección. Y no lo mezcles con el tipo C, que por ser estanco se queda en diez fijos, lleve pantalla o no.</a:t>
+            </a:r>
+          </a:p>
+          <a:p>
+            <a:r>
+              <a:t>N1: Cuarenta sin pantalla; esa es la que preguntan.</a:t>
             </a:r>
           </a:p>
         </p:txBody>
@@ -899,12 +899,12 @@
           <a:lstStyle/>
           <a:p>
             <a:r>
-              <a:t>N1: A ver, profe, esta tabla tiene un montón de casillas. ¿Me la explicas?</a:t>
-            </a:r>
-          </a:p>
-          <a:p>
-            <a:r>
-              <a:t>N2: Tranquilo, que no hay que memorizar treinta y dos casillas, solo leerla con lógica. Cada fila es un tipo de conexión con su norma, y las cuatro columnas de la derecha te dicen si vale para aparato fijo o móvil, y dentro de cada uno para uso doméstico o no doméstico. Fíjate en tres cosas y colocas casi todo. Uno: la rígida y los aceros corrugados de arriba solo dicen que sí en fijos, nunca en móvil. Dos: las dos filas con enchufe de seguridad, la espirometálica y el acero corrugado con enchufe, solo tienen sí en las columnas domésticas, valgan para fijo o para móvil. Y tres: los elastómeros de abajo son el mundo de lo móvil y del gas licuado. Un ejemplo de obra: te llega una cocina de gas suelta en una vivienda, o sea aparato móvil doméstico; miras la columna de móvil doméstico y ves que la rígida es que no, y que te vale, por ejemplo, un flexible con enchufe de seguridad o de elastómero. Las llamadas uno, dos y tres son matices del gas licuado, ahí abajo las tienes.</a:t>
+              <a:t>N1: Profe, esta es una tabla con un montón de casillas. Descríbemela, que la voy escuchando.</a:t>
+            </a:r>
+          </a:p>
+          <a:p>
+            <a:r>
+              <a:t>N2: Vale, presta atención, que te la leo con orden. Imagina una tabla con ocho filas, una por cada tipo de conexión, y cuatro columnas a la derecha que responden sí o no para cuatro casos: aparato fijo doméstico, fijo no doméstico, móvil doméstico y móvil no doméstico. Te la recorro fila a fila. Fila uno, la conexión rígida: sí para los dos fijos, doméstico y no doméstico, y no para los dos móviles. Fila dos, el acero inoxidable corrugado doméstico: igual, sí en los fijos y no en los móviles. Fila tres, el acero corrugado no doméstico: solo dice sí en lo no doméstico, tanto fijo como móvil. Filas cuatro y cinco, las dos con enchufe de seguridad, la espirometálica y el acero corrugado con enchufe: solo sí en lo doméstico, y ahí sirven tanto para fijo como para móvil. Fila seis, el elastómero con armadura: solo sí en móvil no doméstico, y con una llamada que avisa: únicamente con gas licuado. Fila siete, el elastómero normal: sí en los dos móviles, doméstico y no doméstico. Y fila ocho, la metálica corrugada sin enchufe: sí en fijo doméstico y en móvil doméstico. Quédate con tres ideas y colocas casi todo: la rígida y los corrugados de arriba, solo fijos; las de enchufe de seguridad, solo casa; y los elastómeros, el mundo de lo móvil y del gas licuado. Ejemplo de obra: te llega una cocina de gas suelta en una vivienda, o sea móvil doméstico; buscas esa columna y ves que la rígida es que no, y que te vale un flexible con enchufe de seguridad o de elastómero.</a:t>
             </a:r>
           </a:p>
         </p:txBody>
@@ -974,12 +974,12 @@
           <a:lstStyle/>
           <a:p>
             <a:r>
-              <a:t>N1: Otra de examen. La conexión rígida, ese tubo firme, ¿con qué aparato no la puedes usar jamás?</a:t>
-            </a:r>
-          </a:p>
-          <a:p>
-            <a:r>
-              <a:t>N2: Acuérdate de la lógica de la primera tabla: el tubo rígido no acompaña el movimiento.</a:t>
+              <a:t>N1: Otra de examen, para jugar de oído. La pregunta es: ¿para qué aparato no se admite nunca la conexión rígida, ese tubo firme? Opción A, un aparato fijo doméstico; opción B, un aparato fijo no doméstico; opción C, un aparato móvil; opción D, una caldera mural fija.</a:t>
+            </a:r>
+          </a:p>
+          <a:p>
+            <a:r>
+              <a:t>N2: Piénsalo un momento con la lógica de la primera tabla: el tubo rígido no acompaña el movimiento. ¿Cuál descartas y cuál eliges?</a:t>
             </a:r>
           </a:p>
         </p:txBody>
@@ -1049,12 +1049,12 @@
           <a:lstStyle/>
           <a:p>
             <a:r>
-              <a:t>N1: ¿Por qué el móvil?</a:t>
-            </a:r>
-          </a:p>
-          <a:p>
-            <a:r>
-              <a:t>N2: La rígida sirve solo para aparatos fijos, tanto en casa como en industria; en cambio, para cualquier aparato que se mueva se recurre al flexible, que absorbe el desplazamiento. Regla corta: rígida, solo fijos.</a:t>
+              <a:t>N2: La respuesta correcta es la opción C: un aparato móvil. La conexión rígida sirve solo para aparatos fijos, tanto en casa como en industria; por eso las opciones de aparato fijo, la A, la B y la caldera mural de la D, sí admiten rígida. En cambio, para cualquier aparato que se mueva se recurre al flexible, que absorbe el desplazamiento. Regla corta para no fallar: rígida, solo fijos.</a:t>
+            </a:r>
+          </a:p>
+          <a:p>
+            <a:r>
+              <a:t>N1: Si el aparato se mueve, fuera la rígida.</a:t>
             </a:r>
           </a:p>
         </p:txBody>
@@ -1199,12 +1199,12 @@
           <a:lstStyle/>
           <a:p>
             <a:r>
-              <a:t>N1: Piensa en ese enganche rápido que corta el gas solo al tirar de él. ¿Dónde se permite usarlo?</a:t>
-            </a:r>
-          </a:p>
-          <a:p>
-            <a:r>
-              <a:t>N2: Es una comodidad pensada para la casa, no para la industria ni el comercio.</a:t>
+              <a:t>N1: Seguimos, y esta se juega solo con el oído. Las dos conexiones que llevan enchufe de seguridad, ese enganche rápido que corta el gas solo al tirar de él, ¿para qué uso se admiten? Opción A, solo uso doméstico; opción B, solo uso no doméstico; opción C, doméstico y no doméstico; opción D, solo mecheros de laboratorio.</a:t>
+            </a:r>
+          </a:p>
+          <a:p>
+            <a:r>
+              <a:t>N2: Tómate un segundo: es una comodidad pensada para la casa, no para la industria ni el comercio. ¿Con qué opción te quedas?</a:t>
             </a:r>
           </a:p>
         </p:txBody>
@@ -1274,12 +1274,12 @@
           <a:lstStyle/>
           <a:p>
             <a:r>
-              <a:t>N1: ¿Y el porqué?</a:t>
-            </a:r>
-          </a:p>
-          <a:p>
-            <a:r>
-              <a:t>N2: El enchufe de seguridad está pensado para que en casa separes el aparato sin que se escape gas. Por eso las dos filas con enchufe de la tabla son solo de uso doméstico; en comercio o industria no se admiten. Enchufe de seguridad es igual a casa.</a:t>
+              <a:t>N2: La respuesta correcta es la opción A: solo uso doméstico. El enchufe de seguridad está pensado para que en casa separes el aparato, por ejemplo para limpiar detrás de la cocina, sin que se escape ni una burbuja de gas. Por eso las dos filas con enchufe de la tabla, la espirometálica y el acero corrugado con enchufe, solo dan el sí en las columnas domésticas; en comercio o industria no se admiten. El truco: enchufe de seguridad es igual a casa.</a:t>
+            </a:r>
+          </a:p>
+          <a:p>
+            <a:r>
+              <a:t>N1: Enchufe, siempre doméstico.</a:t>
             </a:r>
           </a:p>
         </p:txBody>
@@ -1499,12 +1499,12 @@
           <a:lstStyle/>
           <a:p>
             <a:r>
-              <a:t>N1: ¿Y esta segunda tabla en qué cambia?</a:t>
-            </a:r>
-          </a:p>
-          <a:p>
-            <a:r>
-              <a:t>N2: Esta es solo para mecheros de laboratorio y para sopletes, esas herramientas que se mueven en la mano. Léela igual, fila a fila, pero fíjate en lo que salta a la vista: las tres primeras filas, la rígida y los aceros corrugados sin enchufe, son que no para los dos, porque a un mechero o a un soplete no los sueldas con tubo firme. Lo que sí vale son los flexibles con enchufe de seguridad, que dan sí en mecheros y sopletes, y los elastómeros. Ojo a un detalle que cae: el elastómero con armadura aquí va según la norma de las mangueras de soldeo y corte, distinta de la de la tabla anterior, porque un soplete al fin y al cabo es una herramienta de soldar. Ejemplo de taller: para el soplete del fontanero, un flexible de elastómero con armadura de soldeo; para un mechero de laboratorio, un flexible con enchufe de seguridad. La llamada con asterisco recuerda que el elastómero según la norma europea es solo para gas licuado.</a:t>
+              <a:t>N1: Y esta segunda tabla, ¿me la describes igual?</a:t>
+            </a:r>
+          </a:p>
+          <a:p>
+            <a:r>
+              <a:t>N2: Claro, esta es más corta: solo tiene dos columnas de respuesta, mecheros de laboratorio y sopletes, esas herramientas que se mueven en la mano. Ocho filas otra vez, y te las leo. Las tres primeras, la rígida y los dos aceros corrugados sin enchufe, son que no para los dos, porque a un mechero o a un soplete no los sueldas con tubo firme. Filas cuatro y cinco, las dos con enchufe de seguridad, la espirometálica y el acero corrugado con enchufe: sí para mecheros y sí para sopletes. Fila seis, el elastómero con armadura: no para mecheros, pero sí para sopletes, y ahí sigue la norma de las mangueras de soldeo y corte, porque un soplete al fin y al cabo es una herramienta de soldar. Fila siete, el elastómero normal: sí en los dos, mecheros y sopletes, con una llamada de asterisco que recuerda que según la norma europea es solo para gas licuado. Y fila ocho, la metálica corrugada sin enchufe: sí para mecheros, pero no para sopletes. La idea que resume la tabla: rígida siempre no, y para todo lo demás, flexibles. Ejemplo de taller: para el soplete del fontanero, un elastómero con armadura de soldeo; para un mechero de laboratorio, un flexible con enchufe de seguridad.</a:t>
             </a:r>
           </a:p>
         </p:txBody>
